--- a/module-02-line-tracking/slides/01-the-reflectance-sensor.pptx
+++ b/module-02-line-tracking/slides/01-the-reflectance-sensor.pptx
@@ -1,23 +1,23 @@
 
 <file path=ppt/presentation.xml><?xml version="1.0" encoding="utf-8"?>
-<p:presentation xmlns:a="http://schemas.openxmlformats.org/drawingml/2006/main" xmlns:r="http://schemas.openxmlformats.org/officeDocument/2006/relationships" xmlns:p="http://schemas.openxmlformats.org/presentationml/2006/main" xmlns:m="http://schemas.openxmlformats.org/officeDocument/2006/math" xmlns:a14="http://schemas.microsoft.com/office/drawing/2010/main">
+<p:presentation xmlns:a="http://schemas.openxmlformats.org/drawingml/2006/main" xmlns:r="http://schemas.openxmlformats.org/officeDocument/2006/relationships" xmlns:p="http://schemas.openxmlformats.org/presentationml/2006/main">
   <p:sldMasterIdLst>
-    <p:sldMasterId id="2147483648" r:id="rId5"/>
+    <p:sldMasterId id="2147483648" r:id="rId1"/>
   </p:sldMasterIdLst>
   <p:notesMasterIdLst>
-    <p:notesMasterId r:id="rId7"/>
+    <p:notesMasterId r:id="rId12"/>
   </p:notesMasterIdLst>
   <p:sldIdLst>
-    <p:sldId id="256" r:id="rId8"/>
-    <p:sldId id="257" r:id="rId9"/>
-    <p:sldId id="258" r:id="rId10"/>
-    <p:sldId id="259" r:id="rId11"/>
-    <p:sldId id="260" r:id="rId12"/>
-    <p:sldId id="261" r:id="rId13"/>
-    <p:sldId id="262" r:id="rId14"/>
-    <p:sldId id="263" r:id="rId15"/>
-    <p:sldId id="264" r:id="rId16"/>
-    <p:sldId id="265" r:id="rId17"/>
+    <p:sldId id="256" r:id="rId2"/>
+    <p:sldId id="257" r:id="rId3"/>
+    <p:sldId id="258" r:id="rId4"/>
+    <p:sldId id="259" r:id="rId5"/>
+    <p:sldId id="260" r:id="rId6"/>
+    <p:sldId id="261" r:id="rId7"/>
+    <p:sldId id="262" r:id="rId8"/>
+    <p:sldId id="263" r:id="rId9"/>
+    <p:sldId id="264" r:id="rId10"/>
+    <p:sldId id="265" r:id="rId11"/>
   </p:sldIdLst>
   <p:sldSz cx="12179300" cy="6858000"/>
   <p:notesSz cx="6858000" cy="9144000"/>
@@ -37,7 +37,7 @@
       <a:buFontTx/>
       <a:buNone/>
       <a:tabLst/>
-      <a:defRPr b="0" baseline="0" cap="none" i="0" spc="0" strike="noStrike" sz="1800" u="none" kumimoji="0" normalizeH="0">
+      <a:defRPr kumimoji="0" sz="1800" b="0" i="0" u="none" strike="noStrike" cap="none" spc="0" normalizeH="0" baseline="0">
         <a:ln>
           <a:noFill/>
         </a:ln>
@@ -63,7 +63,7 @@
       <a:buFontTx/>
       <a:buNone/>
       <a:tabLst/>
-      <a:defRPr b="0" baseline="0" cap="none" i="0" spc="0" strike="noStrike" sz="1800" u="none" kumimoji="0" normalizeH="0">
+      <a:defRPr kumimoji="0" sz="1800" b="0" i="0" u="none" strike="noStrike" cap="none" spc="0" normalizeH="0" baseline="0">
         <a:ln>
           <a:noFill/>
         </a:ln>
@@ -93,7 +93,7 @@
       <a:buFontTx/>
       <a:buNone/>
       <a:tabLst/>
-      <a:defRPr b="0" baseline="0" cap="none" i="0" spc="0" strike="noStrike" sz="1800" u="none" kumimoji="0" normalizeH="0">
+      <a:defRPr kumimoji="0" sz="1800" b="0" i="0" u="none" strike="noStrike" cap="none" spc="0" normalizeH="0" baseline="0">
         <a:ln>
           <a:noFill/>
         </a:ln>
@@ -123,7 +123,7 @@
       <a:buFontTx/>
       <a:buNone/>
       <a:tabLst/>
-      <a:defRPr b="0" baseline="0" cap="none" i="0" spc="0" strike="noStrike" sz="1800" u="none" kumimoji="0" normalizeH="0">
+      <a:defRPr kumimoji="0" sz="1800" b="0" i="0" u="none" strike="noStrike" cap="none" spc="0" normalizeH="0" baseline="0">
         <a:ln>
           <a:noFill/>
         </a:ln>
@@ -153,7 +153,7 @@
       <a:buFontTx/>
       <a:buNone/>
       <a:tabLst/>
-      <a:defRPr b="0" baseline="0" cap="none" i="0" spc="0" strike="noStrike" sz="1800" u="none" kumimoji="0" normalizeH="0">
+      <a:defRPr kumimoji="0" sz="1800" b="0" i="0" u="none" strike="noStrike" cap="none" spc="0" normalizeH="0" baseline="0">
         <a:ln>
           <a:noFill/>
         </a:ln>
@@ -183,7 +183,7 @@
       <a:buFontTx/>
       <a:buNone/>
       <a:tabLst/>
-      <a:defRPr b="0" baseline="0" cap="none" i="0" spc="0" strike="noStrike" sz="1800" u="none" kumimoji="0" normalizeH="0">
+      <a:defRPr kumimoji="0" sz="1800" b="0" i="0" u="none" strike="noStrike" cap="none" spc="0" normalizeH="0" baseline="0">
         <a:ln>
           <a:noFill/>
         </a:ln>
@@ -213,7 +213,7 @@
       <a:buFontTx/>
       <a:buNone/>
       <a:tabLst/>
-      <a:defRPr b="0" baseline="0" cap="none" i="0" spc="0" strike="noStrike" sz="1800" u="none" kumimoji="0" normalizeH="0">
+      <a:defRPr kumimoji="0" sz="1800" b="0" i="0" u="none" strike="noStrike" cap="none" spc="0" normalizeH="0" baseline="0">
         <a:ln>
           <a:noFill/>
         </a:ln>
@@ -243,7 +243,7 @@
       <a:buFontTx/>
       <a:buNone/>
       <a:tabLst/>
-      <a:defRPr b="0" baseline="0" cap="none" i="0" spc="0" strike="noStrike" sz="1800" u="none" kumimoji="0" normalizeH="0">
+      <a:defRPr kumimoji="0" sz="1800" b="0" i="0" u="none" strike="noStrike" cap="none" spc="0" normalizeH="0" baseline="0">
         <a:ln>
           <a:noFill/>
         </a:ln>
@@ -273,7 +273,7 @@
       <a:buFontTx/>
       <a:buNone/>
       <a:tabLst/>
-      <a:defRPr b="0" baseline="0" cap="none" i="0" spc="0" strike="noStrike" sz="1800" u="none" kumimoji="0" normalizeH="0">
+      <a:defRPr kumimoji="0" sz="1800" b="0" i="0" u="none" strike="noStrike" cap="none" spc="0" normalizeH="0" baseline="0">
         <a:ln>
           <a:noFill/>
         </a:ln>
@@ -303,7 +303,7 @@
       <a:buFontTx/>
       <a:buNone/>
       <a:tabLst/>
-      <a:defRPr b="0" baseline="0" cap="none" i="0" spc="0" strike="noStrike" sz="1800" u="none" kumimoji="0" normalizeH="0">
+      <a:defRPr kumimoji="0" sz="1800" b="0" i="0" u="none" strike="noStrike" cap="none" spc="0" normalizeH="0" baseline="0">
         <a:ln>
           <a:noFill/>
         </a:ln>
@@ -322,13 +322,14 @@
 </p:presentation>
 </file>
 
-<file path=ppt/commentAuthors.xml><?xml version="1.0" encoding="utf-8"?>
-<p:cmAuthorLst xmlns:a="http://schemas.openxmlformats.org/drawingml/2006/main" xmlns:r="http://schemas.openxmlformats.org/officeDocument/2006/relationships" xmlns:p="http://schemas.openxmlformats.org/presentationml/2006/main" xmlns:m="http://schemas.openxmlformats.org/officeDocument/2006/math" xmlns:a14="http://schemas.microsoft.com/office/drawing/2010/main"/>
-</file>
-
 <file path=ppt/notesMasters/notesMaster1.xml><?xml version="1.0" encoding="utf-8"?>
-<p:notesMaster xmlns:a="http://schemas.openxmlformats.org/drawingml/2006/main" xmlns:r="http://schemas.openxmlformats.org/officeDocument/2006/relationships" xmlns:p="http://schemas.openxmlformats.org/presentationml/2006/main" xmlns:m="http://schemas.openxmlformats.org/officeDocument/2006/math" xmlns:a14="http://schemas.microsoft.com/office/drawing/2010/main">
+<p:notesMaster xmlns:a="http://schemas.openxmlformats.org/drawingml/2006/main" xmlns:r="http://schemas.openxmlformats.org/officeDocument/2006/relationships" xmlns:p="http://schemas.openxmlformats.org/presentationml/2006/main">
   <p:cSld>
+    <p:bg>
+      <p:bgRef idx="1001">
+        <a:schemeClr val="bg1"/>
+      </p:bgRef>
+    </p:bg>
     <p:spTree>
       <p:nvGrpSpPr>
         <p:cNvPr id="1" name=""/>
@@ -346,7 +347,9 @@
       <p:sp>
         <p:nvSpPr>
           <p:cNvPr id="91" name="Shape 91"/>
-          <p:cNvSpPr/>
+          <p:cNvSpPr>
+            <a:spLocks noGrp="1" noRot="1" noChangeAspect="1"/>
+          </p:cNvSpPr>
           <p:nvPr>
             <p:ph type="sldImg"/>
           </p:nvPr>
@@ -364,14 +367,16 @@
           <a:bodyPr/>
           <a:lstStyle/>
           <a:p>
-            <a:pPr/>
+            <a:endParaRPr/>
           </a:p>
         </p:txBody>
       </p:sp>
       <p:sp>
         <p:nvSpPr>
           <p:cNvPr id="92" name="Shape 92"/>
-          <p:cNvSpPr/>
+          <p:cNvSpPr>
+            <a:spLocks noGrp="1"/>
+          </p:cNvSpPr>
           <p:nvPr>
             <p:ph type="body" sz="quarter" idx="1"/>
           </p:nvPr>
@@ -389,7 +394,7 @@
           <a:bodyPr/>
           <a:lstStyle/>
           <a:p>
-            <a:pPr/>
+            <a:endParaRPr/>
           </a:p>
         </p:txBody>
       </p:sp>
@@ -474,7 +479,7 @@
 </file>
 
 <file path=ppt/slideLayouts/slideLayout1.xml><?xml version="1.0" encoding="utf-8"?>
-<p:sldLayout xmlns:a="http://schemas.openxmlformats.org/drawingml/2006/main" xmlns:r="http://schemas.openxmlformats.org/officeDocument/2006/relationships" xmlns:p="http://schemas.openxmlformats.org/presentationml/2006/main" xmlns:m="http://schemas.openxmlformats.org/officeDocument/2006/math" xmlns:a14="http://schemas.microsoft.com/office/drawing/2010/main" type="title" showMasterSp="1" showMasterPhAnim="1">
+<p:sldLayout xmlns:a="http://schemas.openxmlformats.org/drawingml/2006/main" xmlns:r="http://schemas.openxmlformats.org/officeDocument/2006/relationships" xmlns:p="http://schemas.openxmlformats.org/presentationml/2006/main" type="title">
   <p:cSld name="Title Slide">
     <p:spTree>
       <p:nvGrpSpPr>
@@ -493,7 +498,9 @@
       <p:sp>
         <p:nvSpPr>
           <p:cNvPr id="11" name="Title Text"/>
-          <p:cNvSpPr txBox="1"/>
+          <p:cNvSpPr txBox="1">
+            <a:spLocks noGrp="1"/>
+          </p:cNvSpPr>
           <p:nvPr>
             <p:ph type="title"/>
           </p:nvPr>
@@ -511,7 +518,6 @@
           <a:bodyPr/>
           <a:lstStyle/>
           <a:p>
-            <a:pPr/>
             <a:r>
               <a:t>Title Text</a:t>
             </a:r>
@@ -521,7 +527,9 @@
       <p:sp>
         <p:nvSpPr>
           <p:cNvPr id="12" name="Body Level One…"/>
-          <p:cNvSpPr txBox="1"/>
+          <p:cNvSpPr txBox="1">
+            <a:spLocks noGrp="1"/>
+          </p:cNvSpPr>
           <p:nvPr>
             <p:ph type="body" sz="quarter" idx="1"/>
           </p:nvPr>
@@ -590,7 +598,6 @@
             </a:lvl5pPr>
           </a:lstStyle>
           <a:p>
-            <a:pPr/>
             <a:r>
               <a:t>Body Level One</a:t>
             </a:r>
@@ -624,7 +631,9 @@
       <p:sp>
         <p:nvSpPr>
           <p:cNvPr id="13" name="Slide Number"/>
-          <p:cNvSpPr txBox="1"/>
+          <p:cNvSpPr txBox="1">
+            <a:spLocks noGrp="1"/>
+          </p:cNvSpPr>
           <p:nvPr>
             <p:ph type="sldNum" sz="quarter" idx="2"/>
           </p:nvPr>
@@ -638,8 +647,10 @@
           <a:bodyPr/>
           <a:lstStyle/>
           <a:p>
-            <a:pPr/>
-            <a:fld id="{86CB4B4D-7CA3-9044-876B-883B54F8677D}" type="slidenum"/>
+            <a:fld id="{86CB4B4D-7CA3-9044-876B-883B54F8677D}" type="slidenum">
+              <a:t>‹#›</a:t>
+            </a:fld>
+            <a:endParaRPr/>
           </a:p>
         </p:txBody>
       </p:sp>
@@ -648,12 +659,12 @@
   <p:clrMapOvr>
     <a:masterClrMapping/>
   </p:clrMapOvr>
-  <p:transition xmlns:p14="http://schemas.microsoft.com/office/powerpoint/2010/main" spd="med" advClick="1"/>
+  <p:transition spd="med"/>
 </p:sldLayout>
 </file>
 
 <file path=ppt/slideLayouts/slideLayout2.xml><?xml version="1.0" encoding="utf-8"?>
-<p:sldLayout xmlns:a="http://schemas.openxmlformats.org/drawingml/2006/main" xmlns:r="http://schemas.openxmlformats.org/officeDocument/2006/relationships" xmlns:p="http://schemas.openxmlformats.org/presentationml/2006/main" xmlns:m="http://schemas.openxmlformats.org/officeDocument/2006/math" xmlns:a14="http://schemas.microsoft.com/office/drawing/2010/main" type="tx" showMasterSp="1" showMasterPhAnim="1">
+<p:sldLayout xmlns:a="http://schemas.openxmlformats.org/drawingml/2006/main" xmlns:r="http://schemas.openxmlformats.org/officeDocument/2006/relationships" xmlns:p="http://schemas.openxmlformats.org/presentationml/2006/main" type="tx">
   <p:cSld name="Title and Content">
     <p:spTree>
       <p:nvGrpSpPr>
@@ -672,7 +683,9 @@
       <p:sp>
         <p:nvSpPr>
           <p:cNvPr id="20" name="Title Text"/>
-          <p:cNvSpPr txBox="1"/>
+          <p:cNvSpPr txBox="1">
+            <a:spLocks noGrp="1"/>
+          </p:cNvSpPr>
           <p:nvPr>
             <p:ph type="title"/>
           </p:nvPr>
@@ -690,7 +703,6 @@
           <a:bodyPr/>
           <a:lstStyle/>
           <a:p>
-            <a:pPr/>
             <a:r>
               <a:t>Title Text</a:t>
             </a:r>
@@ -700,7 +712,9 @@
       <p:sp>
         <p:nvSpPr>
           <p:cNvPr id="21" name="Body Level One…"/>
-          <p:cNvSpPr txBox="1"/>
+          <p:cNvSpPr txBox="1">
+            <a:spLocks noGrp="1"/>
+          </p:cNvSpPr>
           <p:nvPr>
             <p:ph type="body" idx="1"/>
           </p:nvPr>
@@ -718,7 +732,6 @@
           <a:bodyPr/>
           <a:lstStyle/>
           <a:p>
-            <a:pPr/>
             <a:r>
               <a:t>Body Level One</a:t>
             </a:r>
@@ -752,7 +765,9 @@
       <p:sp>
         <p:nvSpPr>
           <p:cNvPr id="22" name="Slide Number"/>
-          <p:cNvSpPr txBox="1"/>
+          <p:cNvSpPr txBox="1">
+            <a:spLocks noGrp="1"/>
+          </p:cNvSpPr>
           <p:nvPr>
             <p:ph type="sldNum" sz="quarter" idx="2"/>
           </p:nvPr>
@@ -766,8 +781,10 @@
           <a:bodyPr/>
           <a:lstStyle/>
           <a:p>
-            <a:pPr/>
-            <a:fld id="{86CB4B4D-7CA3-9044-876B-883B54F8677D}" type="slidenum"/>
+            <a:fld id="{86CB4B4D-7CA3-9044-876B-883B54F8677D}" type="slidenum">
+              <a:t>‹#›</a:t>
+            </a:fld>
+            <a:endParaRPr/>
           </a:p>
         </p:txBody>
       </p:sp>
@@ -776,12 +793,12 @@
   <p:clrMapOvr>
     <a:masterClrMapping/>
   </p:clrMapOvr>
-  <p:transition xmlns:p14="http://schemas.microsoft.com/office/powerpoint/2010/main" spd="med" advClick="1"/>
+  <p:transition spd="med"/>
 </p:sldLayout>
 </file>
 
 <file path=ppt/slideLayouts/slideLayout3.xml><?xml version="1.0" encoding="utf-8"?>
-<p:sldLayout xmlns:a="http://schemas.openxmlformats.org/drawingml/2006/main" xmlns:r="http://schemas.openxmlformats.org/officeDocument/2006/relationships" xmlns:p="http://schemas.openxmlformats.org/presentationml/2006/main" xmlns:m="http://schemas.openxmlformats.org/officeDocument/2006/math" xmlns:a14="http://schemas.microsoft.com/office/drawing/2010/main" type="tx" showMasterSp="1" showMasterPhAnim="1">
+<p:sldLayout xmlns:a="http://schemas.openxmlformats.org/drawingml/2006/main" xmlns:r="http://schemas.openxmlformats.org/officeDocument/2006/relationships" xmlns:p="http://schemas.openxmlformats.org/presentationml/2006/main" type="tx">
   <p:cSld name="Section Header">
     <p:spTree>
       <p:nvGrpSpPr>
@@ -800,7 +817,9 @@
       <p:sp>
         <p:nvSpPr>
           <p:cNvPr id="29" name="Title Text"/>
-          <p:cNvSpPr txBox="1"/>
+          <p:cNvSpPr txBox="1">
+            <a:spLocks noGrp="1"/>
+          </p:cNvSpPr>
           <p:nvPr>
             <p:ph type="title"/>
           </p:nvPr>
@@ -818,11 +837,10 @@
           <a:bodyPr anchor="t"/>
           <a:lstStyle>
             <a:lvl1pPr algn="l">
-              <a:defRPr b="1" cap="all" sz="4000"/>
+              <a:defRPr sz="4000" b="1" cap="all"/>
             </a:lvl1pPr>
           </a:lstStyle>
           <a:p>
-            <a:pPr/>
             <a:r>
               <a:t>Title Text</a:t>
             </a:r>
@@ -832,7 +850,9 @@
       <p:sp>
         <p:nvSpPr>
           <p:cNvPr id="30" name="Body Level One…"/>
-          <p:cNvSpPr txBox="1"/>
+          <p:cNvSpPr txBox="1">
+            <a:spLocks noGrp="1"/>
+          </p:cNvSpPr>
           <p:nvPr>
             <p:ph type="body" sz="quarter" idx="1"/>
           </p:nvPr>
@@ -916,7 +936,6 @@
             </a:lvl5pPr>
           </a:lstStyle>
           <a:p>
-            <a:pPr/>
             <a:r>
               <a:t>Body Level One</a:t>
             </a:r>
@@ -950,7 +969,9 @@
       <p:sp>
         <p:nvSpPr>
           <p:cNvPr id="31" name="Slide Number"/>
-          <p:cNvSpPr txBox="1"/>
+          <p:cNvSpPr txBox="1">
+            <a:spLocks noGrp="1"/>
+          </p:cNvSpPr>
           <p:nvPr>
             <p:ph type="sldNum" sz="quarter" idx="2"/>
           </p:nvPr>
@@ -964,8 +985,10 @@
           <a:bodyPr/>
           <a:lstStyle/>
           <a:p>
-            <a:pPr/>
-            <a:fld id="{86CB4B4D-7CA3-9044-876B-883B54F8677D}" type="slidenum"/>
+            <a:fld id="{86CB4B4D-7CA3-9044-876B-883B54F8677D}" type="slidenum">
+              <a:t>‹#›</a:t>
+            </a:fld>
+            <a:endParaRPr/>
           </a:p>
         </p:txBody>
       </p:sp>
@@ -974,12 +997,12 @@
   <p:clrMapOvr>
     <a:masterClrMapping/>
   </p:clrMapOvr>
-  <p:transition xmlns:p14="http://schemas.microsoft.com/office/powerpoint/2010/main" spd="med" advClick="1"/>
+  <p:transition spd="med"/>
 </p:sldLayout>
 </file>
 
 <file path=ppt/slideLayouts/slideLayout4.xml><?xml version="1.0" encoding="utf-8"?>
-<p:sldLayout xmlns:a="http://schemas.openxmlformats.org/drawingml/2006/main" xmlns:r="http://schemas.openxmlformats.org/officeDocument/2006/relationships" xmlns:p="http://schemas.openxmlformats.org/presentationml/2006/main" xmlns:m="http://schemas.openxmlformats.org/officeDocument/2006/math" xmlns:a14="http://schemas.microsoft.com/office/drawing/2010/main" type="tx" showMasterSp="1" showMasterPhAnim="1">
+<p:sldLayout xmlns:a="http://schemas.openxmlformats.org/drawingml/2006/main" xmlns:r="http://schemas.openxmlformats.org/officeDocument/2006/relationships" xmlns:p="http://schemas.openxmlformats.org/presentationml/2006/main" type="tx">
   <p:cSld name="Two Content">
     <p:spTree>
       <p:nvGrpSpPr>
@@ -998,7 +1021,9 @@
       <p:sp>
         <p:nvSpPr>
           <p:cNvPr id="38" name="Title Text"/>
-          <p:cNvSpPr txBox="1"/>
+          <p:cNvSpPr txBox="1">
+            <a:spLocks noGrp="1"/>
+          </p:cNvSpPr>
           <p:nvPr>
             <p:ph type="title"/>
           </p:nvPr>
@@ -1016,7 +1041,6 @@
           <a:bodyPr/>
           <a:lstStyle/>
           <a:p>
-            <a:pPr/>
             <a:r>
               <a:t>Title Text</a:t>
             </a:r>
@@ -1026,7 +1050,9 @@
       <p:sp>
         <p:nvSpPr>
           <p:cNvPr id="39" name="Body Level One…"/>
-          <p:cNvSpPr txBox="1"/>
+          <p:cNvSpPr txBox="1">
+            <a:spLocks noGrp="1"/>
+          </p:cNvSpPr>
           <p:nvPr>
             <p:ph type="body" sz="half" idx="1"/>
           </p:nvPr>
@@ -1075,7 +1101,6 @@
             </a:lvl5pPr>
           </a:lstStyle>
           <a:p>
-            <a:pPr/>
             <a:r>
               <a:t>Body Level One</a:t>
             </a:r>
@@ -1109,7 +1134,9 @@
       <p:sp>
         <p:nvSpPr>
           <p:cNvPr id="40" name="Slide Number"/>
-          <p:cNvSpPr txBox="1"/>
+          <p:cNvSpPr txBox="1">
+            <a:spLocks noGrp="1"/>
+          </p:cNvSpPr>
           <p:nvPr>
             <p:ph type="sldNum" sz="quarter" idx="2"/>
           </p:nvPr>
@@ -1123,8 +1150,10 @@
           <a:bodyPr/>
           <a:lstStyle/>
           <a:p>
-            <a:pPr/>
-            <a:fld id="{86CB4B4D-7CA3-9044-876B-883B54F8677D}" type="slidenum"/>
+            <a:fld id="{86CB4B4D-7CA3-9044-876B-883B54F8677D}" type="slidenum">
+              <a:t>‹#›</a:t>
+            </a:fld>
+            <a:endParaRPr/>
           </a:p>
         </p:txBody>
       </p:sp>
@@ -1133,12 +1162,12 @@
   <p:clrMapOvr>
     <a:masterClrMapping/>
   </p:clrMapOvr>
-  <p:transition xmlns:p14="http://schemas.microsoft.com/office/powerpoint/2010/main" spd="med" advClick="1"/>
+  <p:transition spd="med"/>
 </p:sldLayout>
 </file>
 
 <file path=ppt/slideLayouts/slideLayout5.xml><?xml version="1.0" encoding="utf-8"?>
-<p:sldLayout xmlns:a="http://schemas.openxmlformats.org/drawingml/2006/main" xmlns:r="http://schemas.openxmlformats.org/officeDocument/2006/relationships" xmlns:p="http://schemas.openxmlformats.org/presentationml/2006/main" xmlns:m="http://schemas.openxmlformats.org/officeDocument/2006/math" xmlns:a14="http://schemas.microsoft.com/office/drawing/2010/main" type="tx" showMasterSp="1" showMasterPhAnim="1">
+<p:sldLayout xmlns:a="http://schemas.openxmlformats.org/drawingml/2006/main" xmlns:r="http://schemas.openxmlformats.org/officeDocument/2006/relationships" xmlns:p="http://schemas.openxmlformats.org/presentationml/2006/main" type="tx">
   <p:cSld name="Comparison">
     <p:spTree>
       <p:nvGrpSpPr>
@@ -1157,7 +1186,9 @@
       <p:sp>
         <p:nvSpPr>
           <p:cNvPr id="47" name="Title Text"/>
-          <p:cNvSpPr txBox="1"/>
+          <p:cNvSpPr txBox="1">
+            <a:spLocks noGrp="1"/>
+          </p:cNvSpPr>
           <p:nvPr>
             <p:ph type="title"/>
           </p:nvPr>
@@ -1175,7 +1206,6 @@
           <a:bodyPr/>
           <a:lstStyle/>
           <a:p>
-            <a:pPr/>
             <a:r>
               <a:t>Title Text</a:t>
             </a:r>
@@ -1185,7 +1215,9 @@
       <p:sp>
         <p:nvSpPr>
           <p:cNvPr id="48" name="Body Level One…"/>
-          <p:cNvSpPr txBox="1"/>
+          <p:cNvSpPr txBox="1">
+            <a:spLocks noGrp="1"/>
+          </p:cNvSpPr>
           <p:nvPr>
             <p:ph type="body" sz="quarter" idx="1"/>
           </p:nvPr>
@@ -1209,7 +1241,7 @@
               <a:buSzTx/>
               <a:buFontTx/>
               <a:buNone/>
-              <a:defRPr b="1" sz="2400"/>
+              <a:defRPr sz="2400" b="1"/>
             </a:lvl1pPr>
             <a:lvl2pPr marL="0" indent="457200">
               <a:spcBef>
@@ -1218,7 +1250,7 @@
               <a:buSzTx/>
               <a:buFontTx/>
               <a:buNone/>
-              <a:defRPr b="1" sz="2400"/>
+              <a:defRPr sz="2400" b="1"/>
             </a:lvl2pPr>
             <a:lvl3pPr marL="0" indent="914400">
               <a:spcBef>
@@ -1227,7 +1259,7 @@
               <a:buSzTx/>
               <a:buFontTx/>
               <a:buNone/>
-              <a:defRPr b="1" sz="2400"/>
+              <a:defRPr sz="2400" b="1"/>
             </a:lvl3pPr>
             <a:lvl4pPr marL="0" indent="1371600">
               <a:spcBef>
@@ -1236,7 +1268,7 @@
               <a:buSzTx/>
               <a:buFontTx/>
               <a:buNone/>
-              <a:defRPr b="1" sz="2400"/>
+              <a:defRPr sz="2400" b="1"/>
             </a:lvl4pPr>
             <a:lvl5pPr marL="0" indent="1828800">
               <a:spcBef>
@@ -1245,11 +1277,10 @@
               <a:buSzTx/>
               <a:buFontTx/>
               <a:buNone/>
-              <a:defRPr b="1" sz="2400"/>
+              <a:defRPr sz="2400" b="1"/>
             </a:lvl5pPr>
           </a:lstStyle>
           <a:p>
-            <a:pPr/>
             <a:r>
               <a:t>Body Level One</a:t>
             </a:r>
@@ -1283,7 +1314,9 @@
       <p:sp>
         <p:nvSpPr>
           <p:cNvPr id="49" name="Text Placeholder 4"/>
-          <p:cNvSpPr/>
+          <p:cNvSpPr>
+            <a:spLocks noGrp="1"/>
+          </p:cNvSpPr>
           <p:nvPr>
             <p:ph type="body" sz="quarter" idx="21"/>
           </p:nvPr>
@@ -1308,15 +1341,18 @@
               <a:buSzTx/>
               <a:buFontTx/>
               <a:buNone/>
-              <a:defRPr b="1" sz="2400"/>
-            </a:pPr>
+              <a:defRPr sz="2400" b="1"/>
+            </a:pPr>
+            <a:endParaRPr/>
           </a:p>
         </p:txBody>
       </p:sp>
       <p:sp>
         <p:nvSpPr>
           <p:cNvPr id="50" name="Slide Number"/>
-          <p:cNvSpPr txBox="1"/>
+          <p:cNvSpPr txBox="1">
+            <a:spLocks noGrp="1"/>
+          </p:cNvSpPr>
           <p:nvPr>
             <p:ph type="sldNum" sz="quarter" idx="2"/>
           </p:nvPr>
@@ -1330,8 +1366,10 @@
           <a:bodyPr/>
           <a:lstStyle/>
           <a:p>
-            <a:pPr/>
-            <a:fld id="{86CB4B4D-7CA3-9044-876B-883B54F8677D}" type="slidenum"/>
+            <a:fld id="{86CB4B4D-7CA3-9044-876B-883B54F8677D}" type="slidenum">
+              <a:t>‹#›</a:t>
+            </a:fld>
+            <a:endParaRPr/>
           </a:p>
         </p:txBody>
       </p:sp>
@@ -1340,12 +1378,12 @@
   <p:clrMapOvr>
     <a:masterClrMapping/>
   </p:clrMapOvr>
-  <p:transition xmlns:p14="http://schemas.microsoft.com/office/powerpoint/2010/main" spd="med" advClick="1"/>
+  <p:transition spd="med"/>
 </p:sldLayout>
 </file>
 
 <file path=ppt/slideLayouts/slideLayout6.xml><?xml version="1.0" encoding="utf-8"?>
-<p:sldLayout xmlns:a="http://schemas.openxmlformats.org/drawingml/2006/main" xmlns:r="http://schemas.openxmlformats.org/officeDocument/2006/relationships" xmlns:p="http://schemas.openxmlformats.org/presentationml/2006/main" xmlns:m="http://schemas.openxmlformats.org/officeDocument/2006/math" xmlns:a14="http://schemas.microsoft.com/office/drawing/2010/main" type="tx" showMasterSp="1" showMasterPhAnim="1">
+<p:sldLayout xmlns:a="http://schemas.openxmlformats.org/drawingml/2006/main" xmlns:r="http://schemas.openxmlformats.org/officeDocument/2006/relationships" xmlns:p="http://schemas.openxmlformats.org/presentationml/2006/main" type="tx">
   <p:cSld name="Title Only">
     <p:spTree>
       <p:nvGrpSpPr>
@@ -1364,7 +1402,9 @@
       <p:sp>
         <p:nvSpPr>
           <p:cNvPr id="57" name="Title Text"/>
-          <p:cNvSpPr txBox="1"/>
+          <p:cNvSpPr txBox="1">
+            <a:spLocks noGrp="1"/>
+          </p:cNvSpPr>
           <p:nvPr>
             <p:ph type="title"/>
           </p:nvPr>
@@ -1382,7 +1422,6 @@
           <a:bodyPr/>
           <a:lstStyle/>
           <a:p>
-            <a:pPr/>
             <a:r>
               <a:t>Title Text</a:t>
             </a:r>
@@ -1392,7 +1431,9 @@
       <p:sp>
         <p:nvSpPr>
           <p:cNvPr id="58" name="Slide Number"/>
-          <p:cNvSpPr txBox="1"/>
+          <p:cNvSpPr txBox="1">
+            <a:spLocks noGrp="1"/>
+          </p:cNvSpPr>
           <p:nvPr>
             <p:ph type="sldNum" sz="quarter" idx="2"/>
           </p:nvPr>
@@ -1406,8 +1447,10 @@
           <a:bodyPr/>
           <a:lstStyle/>
           <a:p>
-            <a:pPr/>
-            <a:fld id="{86CB4B4D-7CA3-9044-876B-883B54F8677D}" type="slidenum"/>
+            <a:fld id="{86CB4B4D-7CA3-9044-876B-883B54F8677D}" type="slidenum">
+              <a:t>‹#›</a:t>
+            </a:fld>
+            <a:endParaRPr/>
           </a:p>
         </p:txBody>
       </p:sp>
@@ -1416,12 +1459,12 @@
   <p:clrMapOvr>
     <a:masterClrMapping/>
   </p:clrMapOvr>
-  <p:transition xmlns:p14="http://schemas.microsoft.com/office/powerpoint/2010/main" spd="med" advClick="1"/>
+  <p:transition spd="med"/>
 </p:sldLayout>
 </file>
 
 <file path=ppt/slideLayouts/slideLayout7.xml><?xml version="1.0" encoding="utf-8"?>
-<p:sldLayout xmlns:a="http://schemas.openxmlformats.org/drawingml/2006/main" xmlns:r="http://schemas.openxmlformats.org/officeDocument/2006/relationships" xmlns:p="http://schemas.openxmlformats.org/presentationml/2006/main" xmlns:m="http://schemas.openxmlformats.org/officeDocument/2006/math" xmlns:a14="http://schemas.microsoft.com/office/drawing/2010/main" type="tx" showMasterSp="1" showMasterPhAnim="1">
+<p:sldLayout xmlns:a="http://schemas.openxmlformats.org/drawingml/2006/main" xmlns:r="http://schemas.openxmlformats.org/officeDocument/2006/relationships" xmlns:p="http://schemas.openxmlformats.org/presentationml/2006/main" type="tx">
   <p:cSld name="Blank">
     <p:spTree>
       <p:nvGrpSpPr>
@@ -1440,7 +1483,9 @@
       <p:sp>
         <p:nvSpPr>
           <p:cNvPr id="65" name="Slide Number"/>
-          <p:cNvSpPr txBox="1"/>
+          <p:cNvSpPr txBox="1">
+            <a:spLocks noGrp="1"/>
+          </p:cNvSpPr>
           <p:nvPr>
             <p:ph type="sldNum" sz="quarter" idx="2"/>
           </p:nvPr>
@@ -1454,8 +1499,10 @@
           <a:bodyPr/>
           <a:lstStyle/>
           <a:p>
-            <a:pPr/>
-            <a:fld id="{86CB4B4D-7CA3-9044-876B-883B54F8677D}" type="slidenum"/>
+            <a:fld id="{86CB4B4D-7CA3-9044-876B-883B54F8677D}" type="slidenum">
+              <a:t>‹#›</a:t>
+            </a:fld>
+            <a:endParaRPr/>
           </a:p>
         </p:txBody>
       </p:sp>
@@ -1464,12 +1511,12 @@
   <p:clrMapOvr>
     <a:masterClrMapping/>
   </p:clrMapOvr>
-  <p:transition xmlns:p14="http://schemas.microsoft.com/office/powerpoint/2010/main" spd="med" advClick="1"/>
+  <p:transition spd="med"/>
 </p:sldLayout>
 </file>
 
 <file path=ppt/slideLayouts/slideLayout8.xml><?xml version="1.0" encoding="utf-8"?>
-<p:sldLayout xmlns:a="http://schemas.openxmlformats.org/drawingml/2006/main" xmlns:r="http://schemas.openxmlformats.org/officeDocument/2006/relationships" xmlns:p="http://schemas.openxmlformats.org/presentationml/2006/main" xmlns:m="http://schemas.openxmlformats.org/officeDocument/2006/math" xmlns:a14="http://schemas.microsoft.com/office/drawing/2010/main" type="tx" showMasterSp="1" showMasterPhAnim="1">
+<p:sldLayout xmlns:a="http://schemas.openxmlformats.org/drawingml/2006/main" xmlns:r="http://schemas.openxmlformats.org/officeDocument/2006/relationships" xmlns:p="http://schemas.openxmlformats.org/presentationml/2006/main" type="tx">
   <p:cSld name="Content with Caption">
     <p:spTree>
       <p:nvGrpSpPr>
@@ -1488,7 +1535,9 @@
       <p:sp>
         <p:nvSpPr>
           <p:cNvPr id="72" name="Title Text"/>
-          <p:cNvSpPr txBox="1"/>
+          <p:cNvSpPr txBox="1">
+            <a:spLocks noGrp="1"/>
+          </p:cNvSpPr>
           <p:nvPr>
             <p:ph type="title"/>
           </p:nvPr>
@@ -1506,11 +1555,10 @@
           <a:bodyPr anchor="b"/>
           <a:lstStyle>
             <a:lvl1pPr algn="l">
-              <a:defRPr b="1" sz="2000"/>
+              <a:defRPr sz="2000" b="1"/>
             </a:lvl1pPr>
           </a:lstStyle>
           <a:p>
-            <a:pPr/>
             <a:r>
               <a:t>Title Text</a:t>
             </a:r>
@@ -1520,7 +1568,9 @@
       <p:sp>
         <p:nvSpPr>
           <p:cNvPr id="73" name="Body Level One…"/>
-          <p:cNvSpPr txBox="1"/>
+          <p:cNvSpPr txBox="1">
+            <a:spLocks noGrp="1"/>
+          </p:cNvSpPr>
           <p:nvPr>
             <p:ph type="body" sz="half" idx="1"/>
           </p:nvPr>
@@ -1538,7 +1588,6 @@
           <a:bodyPr/>
           <a:lstStyle/>
           <a:p>
-            <a:pPr/>
             <a:r>
               <a:t>Body Level One</a:t>
             </a:r>
@@ -1572,7 +1621,9 @@
       <p:sp>
         <p:nvSpPr>
           <p:cNvPr id="74" name="Text Placeholder 3"/>
-          <p:cNvSpPr/>
+          <p:cNvSpPr>
+            <a:spLocks noGrp="1"/>
+          </p:cNvSpPr>
           <p:nvPr>
             <p:ph type="body" sz="quarter" idx="21"/>
           </p:nvPr>
@@ -1599,13 +1650,16 @@
               <a:buNone/>
               <a:defRPr sz="1400"/>
             </a:pPr>
+            <a:endParaRPr/>
           </a:p>
         </p:txBody>
       </p:sp>
       <p:sp>
         <p:nvSpPr>
           <p:cNvPr id="75" name="Slide Number"/>
-          <p:cNvSpPr txBox="1"/>
+          <p:cNvSpPr txBox="1">
+            <a:spLocks noGrp="1"/>
+          </p:cNvSpPr>
           <p:nvPr>
             <p:ph type="sldNum" sz="quarter" idx="2"/>
           </p:nvPr>
@@ -1619,8 +1673,10 @@
           <a:bodyPr/>
           <a:lstStyle/>
           <a:p>
-            <a:pPr/>
-            <a:fld id="{86CB4B4D-7CA3-9044-876B-883B54F8677D}" type="slidenum"/>
+            <a:fld id="{86CB4B4D-7CA3-9044-876B-883B54F8677D}" type="slidenum">
+              <a:t>‹#›</a:t>
+            </a:fld>
+            <a:endParaRPr/>
           </a:p>
         </p:txBody>
       </p:sp>
@@ -1629,12 +1685,12 @@
   <p:clrMapOvr>
     <a:masterClrMapping/>
   </p:clrMapOvr>
-  <p:transition xmlns:p14="http://schemas.microsoft.com/office/powerpoint/2010/main" spd="med" advClick="1"/>
+  <p:transition spd="med"/>
 </p:sldLayout>
 </file>
 
 <file path=ppt/slideLayouts/slideLayout9.xml><?xml version="1.0" encoding="utf-8"?>
-<p:sldLayout xmlns:a="http://schemas.openxmlformats.org/drawingml/2006/main" xmlns:r="http://schemas.openxmlformats.org/officeDocument/2006/relationships" xmlns:p="http://schemas.openxmlformats.org/presentationml/2006/main" xmlns:m="http://schemas.openxmlformats.org/officeDocument/2006/math" xmlns:a14="http://schemas.microsoft.com/office/drawing/2010/main" type="tx" showMasterSp="1" showMasterPhAnim="1">
+<p:sldLayout xmlns:a="http://schemas.openxmlformats.org/drawingml/2006/main" xmlns:r="http://schemas.openxmlformats.org/officeDocument/2006/relationships" xmlns:p="http://schemas.openxmlformats.org/presentationml/2006/main" type="tx">
   <p:cSld name="Picture with Caption">
     <p:spTree>
       <p:nvGrpSpPr>
@@ -1653,7 +1709,9 @@
       <p:sp>
         <p:nvSpPr>
           <p:cNvPr id="82" name="Title Text"/>
-          <p:cNvSpPr txBox="1"/>
+          <p:cNvSpPr txBox="1">
+            <a:spLocks noGrp="1"/>
+          </p:cNvSpPr>
           <p:nvPr>
             <p:ph type="title"/>
           </p:nvPr>
@@ -1671,11 +1729,10 @@
           <a:bodyPr anchor="b"/>
           <a:lstStyle>
             <a:lvl1pPr algn="l">
-              <a:defRPr b="1" sz="2000"/>
+              <a:defRPr sz="2000" b="1"/>
             </a:lvl1pPr>
           </a:lstStyle>
           <a:p>
-            <a:pPr/>
             <a:r>
               <a:t>Title Text</a:t>
             </a:r>
@@ -1685,7 +1742,9 @@
       <p:sp>
         <p:nvSpPr>
           <p:cNvPr id="83" name="Picture Placeholder 2"/>
-          <p:cNvSpPr/>
+          <p:cNvSpPr>
+            <a:spLocks noGrp="1"/>
+          </p:cNvSpPr>
           <p:nvPr>
             <p:ph type="pic" sz="half" idx="21"/>
           </p:nvPr>
@@ -1705,14 +1764,16 @@
           </a:bodyPr>
           <a:lstStyle/>
           <a:p>
-            <a:pPr/>
+            <a:endParaRPr/>
           </a:p>
         </p:txBody>
       </p:sp>
       <p:sp>
         <p:nvSpPr>
           <p:cNvPr id="84" name="Body Level One…"/>
-          <p:cNvSpPr txBox="1"/>
+          <p:cNvSpPr txBox="1">
+            <a:spLocks noGrp="1"/>
+          </p:cNvSpPr>
           <p:nvPr>
             <p:ph type="body" sz="quarter" idx="1"/>
           </p:nvPr>
@@ -1776,7 +1837,6 @@
             </a:lvl5pPr>
           </a:lstStyle>
           <a:p>
-            <a:pPr/>
             <a:r>
               <a:t>Body Level One</a:t>
             </a:r>
@@ -1810,7 +1870,9 @@
       <p:sp>
         <p:nvSpPr>
           <p:cNvPr id="85" name="Slide Number"/>
-          <p:cNvSpPr txBox="1"/>
+          <p:cNvSpPr txBox="1">
+            <a:spLocks noGrp="1"/>
+          </p:cNvSpPr>
           <p:nvPr>
             <p:ph type="sldNum" sz="quarter" idx="2"/>
           </p:nvPr>
@@ -1824,8 +1886,10 @@
           <a:bodyPr/>
           <a:lstStyle/>
           <a:p>
-            <a:pPr/>
-            <a:fld id="{86CB4B4D-7CA3-9044-876B-883B54F8677D}" type="slidenum"/>
+            <a:fld id="{86CB4B4D-7CA3-9044-876B-883B54F8677D}" type="slidenum">
+              <a:t>‹#›</a:t>
+            </a:fld>
+            <a:endParaRPr/>
           </a:p>
         </p:txBody>
       </p:sp>
@@ -1834,18 +1898,19 @@
   <p:clrMapOvr>
     <a:masterClrMapping/>
   </p:clrMapOvr>
-  <p:transition xmlns:p14="http://schemas.microsoft.com/office/powerpoint/2010/main" spd="med" advClick="1"/>
+  <p:transition spd="med"/>
 </p:sldLayout>
 </file>
 
 <file path=ppt/slideMasters/slideMaster1.xml><?xml version="1.0" encoding="utf-8"?>
-<p:sldMaster xmlns:a="http://schemas.openxmlformats.org/drawingml/2006/main" xmlns:r="http://schemas.openxmlformats.org/officeDocument/2006/relationships" xmlns:p="http://schemas.openxmlformats.org/presentationml/2006/main" xmlns:m="http://schemas.openxmlformats.org/officeDocument/2006/math" xmlns:a14="http://schemas.microsoft.com/office/drawing/2010/main">
+<p:sldMaster xmlns:a="http://schemas.openxmlformats.org/drawingml/2006/main" xmlns:r="http://schemas.openxmlformats.org/officeDocument/2006/relationships" xmlns:p="http://schemas.openxmlformats.org/presentationml/2006/main">
   <p:cSld>
     <p:bg>
       <p:bgPr>
         <a:solidFill>
           <a:srgbClr val="FFFFFF"/>
         </a:solidFill>
+        <a:effectLst/>
       </p:bgPr>
     </p:bg>
     <p:spTree>
@@ -1865,7 +1930,9 @@
       <p:sp>
         <p:nvSpPr>
           <p:cNvPr id="2" name="Title Text"/>
-          <p:cNvSpPr txBox="1"/>
+          <p:cNvSpPr txBox="1">
+            <a:spLocks noGrp="1"/>
+          </p:cNvSpPr>
           <p:nvPr>
             <p:ph type="title"/>
           </p:nvPr>
@@ -1883,17 +1950,16 @@
           </a:ln>
           <a:extLst>
             <a:ext uri="{C572A759-6A51-4108-AA02-DFA0A04FC94B}">
-              <ma14:wrappingTextBoxFlag xmlns:ma14="http://schemas.microsoft.com/office/mac/drawingml/2011/main" val="1"/>
+              <ma14:wrappingTextBoxFlag xmlns:ma14="http://schemas.microsoft.com/office/mac/drawingml/2011/main" xmlns:a14="http://schemas.microsoft.com/office/drawing/2010/main" xmlns:m="http://schemas.openxmlformats.org/officeDocument/2006/math" xmlns="" val="1"/>
             </a:ext>
           </a:extLst>
         </p:spPr>
         <p:txBody>
           <a:bodyPr lIns="45719" rIns="45719" anchor="ctr">
-            <a:normAutofit fontScale="100000" lnSpcReduction="0"/>
+            <a:normAutofit/>
           </a:bodyPr>
           <a:lstStyle/>
           <a:p>
-            <a:pPr/>
             <a:r>
               <a:t>Title Text</a:t>
             </a:r>
@@ -1903,7 +1969,9 @@
       <p:sp>
         <p:nvSpPr>
           <p:cNvPr id="3" name="Body Level One…"/>
-          <p:cNvSpPr txBox="1"/>
+          <p:cNvSpPr txBox="1">
+            <a:spLocks noGrp="1"/>
+          </p:cNvSpPr>
           <p:nvPr>
             <p:ph type="body" idx="1"/>
           </p:nvPr>
@@ -1921,17 +1989,16 @@
           </a:ln>
           <a:extLst>
             <a:ext uri="{C572A759-6A51-4108-AA02-DFA0A04FC94B}">
-              <ma14:wrappingTextBoxFlag xmlns:ma14="http://schemas.microsoft.com/office/mac/drawingml/2011/main" val="1"/>
+              <ma14:wrappingTextBoxFlag xmlns:ma14="http://schemas.microsoft.com/office/mac/drawingml/2011/main" xmlns:a14="http://schemas.microsoft.com/office/drawing/2010/main" xmlns:m="http://schemas.openxmlformats.org/officeDocument/2006/math" xmlns="" val="1"/>
             </a:ext>
           </a:extLst>
         </p:spPr>
         <p:txBody>
           <a:bodyPr lIns="45719" rIns="45719">
-            <a:normAutofit fontScale="100000" lnSpcReduction="0"/>
+            <a:normAutofit/>
           </a:bodyPr>
           <a:lstStyle/>
           <a:p>
-            <a:pPr/>
             <a:r>
               <a:t>Body Level One</a:t>
             </a:r>
@@ -1965,7 +2032,9 @@
       <p:sp>
         <p:nvSpPr>
           <p:cNvPr id="4" name="Slide Number"/>
-          <p:cNvSpPr txBox="1"/>
+          <p:cNvSpPr txBox="1">
+            <a:spLocks noGrp="1"/>
+          </p:cNvSpPr>
           <p:nvPr>
             <p:ph type="sldNum" sz="quarter" idx="2"/>
           </p:nvPr>
@@ -1996,8 +2065,10 @@
             </a:lvl1pPr>
           </a:lstStyle>
           <a:p>
-            <a:pPr/>
-            <a:fld id="{86CB4B4D-7CA3-9044-876B-883B54F8677D}" type="slidenum"/>
+            <a:fld id="{86CB4B4D-7CA3-9044-876B-883B54F8677D}" type="slidenum">
+              <a:t>‹#›</a:t>
+            </a:fld>
+            <a:endParaRPr/>
           </a:p>
         </p:txBody>
       </p:sp>
@@ -2005,17 +2076,17 @@
   </p:cSld>
   <p:clrMap bg1="lt1" tx1="dk1" bg2="lt2" tx2="dk2" accent1="accent1" accent2="accent2" accent3="accent3" accent4="accent4" accent5="accent5" accent6="accent6" hlink="hlink" folHlink="folHlink"/>
   <p:sldLayoutIdLst>
-    <p:sldLayoutId id="2147483649" r:id="rId2"/>
-    <p:sldLayoutId id="2147483650" r:id="rId3"/>
-    <p:sldLayoutId id="2147483651" r:id="rId4"/>
-    <p:sldLayoutId id="2147483652" r:id="rId5"/>
-    <p:sldLayoutId id="2147483653" r:id="rId6"/>
-    <p:sldLayoutId id="2147483654" r:id="rId7"/>
-    <p:sldLayoutId id="2147483655" r:id="rId8"/>
-    <p:sldLayoutId id="2147483656" r:id="rId9"/>
-    <p:sldLayoutId id="2147483657" r:id="rId10"/>
+    <p:sldLayoutId id="2147483649" r:id="rId1"/>
+    <p:sldLayoutId id="2147483650" r:id="rId2"/>
+    <p:sldLayoutId id="2147483651" r:id="rId3"/>
+    <p:sldLayoutId id="2147483652" r:id="rId4"/>
+    <p:sldLayoutId id="2147483653" r:id="rId5"/>
+    <p:sldLayoutId id="2147483654" r:id="rId6"/>
+    <p:sldLayoutId id="2147483655" r:id="rId7"/>
+    <p:sldLayoutId id="2147483656" r:id="rId8"/>
+    <p:sldLayoutId id="2147483657" r:id="rId9"/>
   </p:sldLayoutIdLst>
-  <p:transition xmlns:p14="http://schemas.microsoft.com/office/powerpoint/2010/main" spd="med" advClick="1"/>
+  <p:transition spd="med"/>
   <p:txStyles>
     <p:titleStyle>
       <a:lvl1pPr marL="0" marR="0" indent="0" algn="ctr" defTabSz="457200" rtl="0" latinLnBrk="0">
@@ -2033,7 +2104,7 @@
         <a:buFontTx/>
         <a:buNone/>
         <a:tabLst/>
-        <a:defRPr b="0" baseline="0" cap="none" i="0" spc="0" strike="noStrike" sz="4400" u="none">
+        <a:defRPr sz="4400" b="0" i="0" u="none" strike="noStrike" cap="none" spc="0" baseline="0">
           <a:solidFill>
             <a:srgbClr val="000000"/>
           </a:solidFill>
@@ -2059,7 +2130,7 @@
         <a:buFontTx/>
         <a:buNone/>
         <a:tabLst/>
-        <a:defRPr b="0" baseline="0" cap="none" i="0" spc="0" strike="noStrike" sz="4400" u="none">
+        <a:defRPr sz="4400" b="0" i="0" u="none" strike="noStrike" cap="none" spc="0" baseline="0">
           <a:solidFill>
             <a:srgbClr val="000000"/>
           </a:solidFill>
@@ -2085,7 +2156,7 @@
         <a:buFontTx/>
         <a:buNone/>
         <a:tabLst/>
-        <a:defRPr b="0" baseline="0" cap="none" i="0" spc="0" strike="noStrike" sz="4400" u="none">
+        <a:defRPr sz="4400" b="0" i="0" u="none" strike="noStrike" cap="none" spc="0" baseline="0">
           <a:solidFill>
             <a:srgbClr val="000000"/>
           </a:solidFill>
@@ -2111,7 +2182,7 @@
         <a:buFontTx/>
         <a:buNone/>
         <a:tabLst/>
-        <a:defRPr b="0" baseline="0" cap="none" i="0" spc="0" strike="noStrike" sz="4400" u="none">
+        <a:defRPr sz="4400" b="0" i="0" u="none" strike="noStrike" cap="none" spc="0" baseline="0">
           <a:solidFill>
             <a:srgbClr val="000000"/>
           </a:solidFill>
@@ -2137,7 +2208,7 @@
         <a:buFontTx/>
         <a:buNone/>
         <a:tabLst/>
-        <a:defRPr b="0" baseline="0" cap="none" i="0" spc="0" strike="noStrike" sz="4400" u="none">
+        <a:defRPr sz="4400" b="0" i="0" u="none" strike="noStrike" cap="none" spc="0" baseline="0">
           <a:solidFill>
             <a:srgbClr val="000000"/>
           </a:solidFill>
@@ -2163,7 +2234,7 @@
         <a:buFontTx/>
         <a:buNone/>
         <a:tabLst/>
-        <a:defRPr b="0" baseline="0" cap="none" i="0" spc="0" strike="noStrike" sz="4400" u="none">
+        <a:defRPr sz="4400" b="0" i="0" u="none" strike="noStrike" cap="none" spc="0" baseline="0">
           <a:solidFill>
             <a:srgbClr val="000000"/>
           </a:solidFill>
@@ -2189,7 +2260,7 @@
         <a:buFontTx/>
         <a:buNone/>
         <a:tabLst/>
-        <a:defRPr b="0" baseline="0" cap="none" i="0" spc="0" strike="noStrike" sz="4400" u="none">
+        <a:defRPr sz="4400" b="0" i="0" u="none" strike="noStrike" cap="none" spc="0" baseline="0">
           <a:solidFill>
             <a:srgbClr val="000000"/>
           </a:solidFill>
@@ -2215,7 +2286,7 @@
         <a:buFontTx/>
         <a:buNone/>
         <a:tabLst/>
-        <a:defRPr b="0" baseline="0" cap="none" i="0" spc="0" strike="noStrike" sz="4400" u="none">
+        <a:defRPr sz="4400" b="0" i="0" u="none" strike="noStrike" cap="none" spc="0" baseline="0">
           <a:solidFill>
             <a:srgbClr val="000000"/>
           </a:solidFill>
@@ -2241,7 +2312,7 @@
         <a:buFontTx/>
         <a:buNone/>
         <a:tabLst/>
-        <a:defRPr b="0" baseline="0" cap="none" i="0" spc="0" strike="noStrike" sz="4400" u="none">
+        <a:defRPr sz="4400" b="0" i="0" u="none" strike="noStrike" cap="none" spc="0" baseline="0">
           <a:solidFill>
             <a:srgbClr val="000000"/>
           </a:solidFill>
@@ -2269,7 +2340,7 @@
         <a:buFont typeface="Arial"/>
         <a:buChar char="•"/>
         <a:tabLst/>
-        <a:defRPr b="0" baseline="0" cap="none" i="0" spc="0" strike="noStrike" sz="3200" u="none">
+        <a:defRPr sz="3200" b="0" i="0" u="none" strike="noStrike" cap="none" spc="0" baseline="0">
           <a:solidFill>
             <a:srgbClr val="000000"/>
           </a:solidFill>
@@ -2295,7 +2366,7 @@
         <a:buFont typeface="Arial"/>
         <a:buChar char="–"/>
         <a:tabLst/>
-        <a:defRPr b="0" baseline="0" cap="none" i="0" spc="0" strike="noStrike" sz="3200" u="none">
+        <a:defRPr sz="3200" b="0" i="0" u="none" strike="noStrike" cap="none" spc="0" baseline="0">
           <a:solidFill>
             <a:srgbClr val="000000"/>
           </a:solidFill>
@@ -2321,7 +2392,7 @@
         <a:buFont typeface="Arial"/>
         <a:buChar char="•"/>
         <a:tabLst/>
-        <a:defRPr b="0" baseline="0" cap="none" i="0" spc="0" strike="noStrike" sz="3200" u="none">
+        <a:defRPr sz="3200" b="0" i="0" u="none" strike="noStrike" cap="none" spc="0" baseline="0">
           <a:solidFill>
             <a:srgbClr val="000000"/>
           </a:solidFill>
@@ -2347,7 +2418,7 @@
         <a:buFont typeface="Arial"/>
         <a:buChar char="–"/>
         <a:tabLst/>
-        <a:defRPr b="0" baseline="0" cap="none" i="0" spc="0" strike="noStrike" sz="3200" u="none">
+        <a:defRPr sz="3200" b="0" i="0" u="none" strike="noStrike" cap="none" spc="0" baseline="0">
           <a:solidFill>
             <a:srgbClr val="000000"/>
           </a:solidFill>
@@ -2373,7 +2444,7 @@
         <a:buFont typeface="Arial"/>
         <a:buChar char="»"/>
         <a:tabLst/>
-        <a:defRPr b="0" baseline="0" cap="none" i="0" spc="0" strike="noStrike" sz="3200" u="none">
+        <a:defRPr sz="3200" b="0" i="0" u="none" strike="noStrike" cap="none" spc="0" baseline="0">
           <a:solidFill>
             <a:srgbClr val="000000"/>
           </a:solidFill>
@@ -2399,7 +2470,7 @@
         <a:buFont typeface="Arial"/>
         <a:buChar char="•"/>
         <a:tabLst/>
-        <a:defRPr b="0" baseline="0" cap="none" i="0" spc="0" strike="noStrike" sz="3200" u="none">
+        <a:defRPr sz="3200" b="0" i="0" u="none" strike="noStrike" cap="none" spc="0" baseline="0">
           <a:solidFill>
             <a:srgbClr val="000000"/>
           </a:solidFill>
@@ -2425,7 +2496,7 @@
         <a:buFont typeface="Arial"/>
         <a:buChar char="•"/>
         <a:tabLst/>
-        <a:defRPr b="0" baseline="0" cap="none" i="0" spc="0" strike="noStrike" sz="3200" u="none">
+        <a:defRPr sz="3200" b="0" i="0" u="none" strike="noStrike" cap="none" spc="0" baseline="0">
           <a:solidFill>
             <a:srgbClr val="000000"/>
           </a:solidFill>
@@ -2451,7 +2522,7 @@
         <a:buFont typeface="Arial"/>
         <a:buChar char="•"/>
         <a:tabLst/>
-        <a:defRPr b="0" baseline="0" cap="none" i="0" spc="0" strike="noStrike" sz="3200" u="none">
+        <a:defRPr sz="3200" b="0" i="0" u="none" strike="noStrike" cap="none" spc="0" baseline="0">
           <a:solidFill>
             <a:srgbClr val="000000"/>
           </a:solidFill>
@@ -2477,7 +2548,7 @@
         <a:buFont typeface="Arial"/>
         <a:buChar char="•"/>
         <a:tabLst/>
-        <a:defRPr b="0" baseline="0" cap="none" i="0" spc="0" strike="noStrike" sz="3200" u="none">
+        <a:defRPr sz="3200" b="0" i="0" u="none" strike="noStrike" cap="none" spc="0" baseline="0">
           <a:solidFill>
             <a:srgbClr val="000000"/>
           </a:solidFill>
@@ -2505,7 +2576,7 @@
         <a:buFontTx/>
         <a:buNone/>
         <a:tabLst/>
-        <a:defRPr b="0" baseline="0" cap="none" i="0" spc="0" strike="noStrike" sz="1200" u="none">
+        <a:defRPr sz="1200" b="0" i="0" u="none" strike="noStrike" cap="none" spc="0" baseline="0">
           <a:solidFill>
             <a:schemeClr val="tx1"/>
           </a:solidFill>
@@ -2531,7 +2602,7 @@
         <a:buFontTx/>
         <a:buNone/>
         <a:tabLst/>
-        <a:defRPr b="0" baseline="0" cap="none" i="0" spc="0" strike="noStrike" sz="1200" u="none">
+        <a:defRPr sz="1200" b="0" i="0" u="none" strike="noStrike" cap="none" spc="0" baseline="0">
           <a:solidFill>
             <a:schemeClr val="tx1"/>
           </a:solidFill>
@@ -2557,7 +2628,7 @@
         <a:buFontTx/>
         <a:buNone/>
         <a:tabLst/>
-        <a:defRPr b="0" baseline="0" cap="none" i="0" spc="0" strike="noStrike" sz="1200" u="none">
+        <a:defRPr sz="1200" b="0" i="0" u="none" strike="noStrike" cap="none" spc="0" baseline="0">
           <a:solidFill>
             <a:schemeClr val="tx1"/>
           </a:solidFill>
@@ -2583,7 +2654,7 @@
         <a:buFontTx/>
         <a:buNone/>
         <a:tabLst/>
-        <a:defRPr b="0" baseline="0" cap="none" i="0" spc="0" strike="noStrike" sz="1200" u="none">
+        <a:defRPr sz="1200" b="0" i="0" u="none" strike="noStrike" cap="none" spc="0" baseline="0">
           <a:solidFill>
             <a:schemeClr val="tx1"/>
           </a:solidFill>
@@ -2609,7 +2680,7 @@
         <a:buFontTx/>
         <a:buNone/>
         <a:tabLst/>
-        <a:defRPr b="0" baseline="0" cap="none" i="0" spc="0" strike="noStrike" sz="1200" u="none">
+        <a:defRPr sz="1200" b="0" i="0" u="none" strike="noStrike" cap="none" spc="0" baseline="0">
           <a:solidFill>
             <a:schemeClr val="tx1"/>
           </a:solidFill>
@@ -2635,7 +2706,7 @@
         <a:buFontTx/>
         <a:buNone/>
         <a:tabLst/>
-        <a:defRPr b="0" baseline="0" cap="none" i="0" spc="0" strike="noStrike" sz="1200" u="none">
+        <a:defRPr sz="1200" b="0" i="0" u="none" strike="noStrike" cap="none" spc="0" baseline="0">
           <a:solidFill>
             <a:schemeClr val="tx1"/>
           </a:solidFill>
@@ -2661,7 +2732,7 @@
         <a:buFontTx/>
         <a:buNone/>
         <a:tabLst/>
-        <a:defRPr b="0" baseline="0" cap="none" i="0" spc="0" strike="noStrike" sz="1200" u="none">
+        <a:defRPr sz="1200" b="0" i="0" u="none" strike="noStrike" cap="none" spc="0" baseline="0">
           <a:solidFill>
             <a:schemeClr val="tx1"/>
           </a:solidFill>
@@ -2687,7 +2758,7 @@
         <a:buFontTx/>
         <a:buNone/>
         <a:tabLst/>
-        <a:defRPr b="0" baseline="0" cap="none" i="0" spc="0" strike="noStrike" sz="1200" u="none">
+        <a:defRPr sz="1200" b="0" i="0" u="none" strike="noStrike" cap="none" spc="0" baseline="0">
           <a:solidFill>
             <a:schemeClr val="tx1"/>
           </a:solidFill>
@@ -2713,7 +2784,7 @@
         <a:buFontTx/>
         <a:buNone/>
         <a:tabLst/>
-        <a:defRPr b="0" baseline="0" cap="none" i="0" spc="0" strike="noStrike" sz="1200" u="none">
+        <a:defRPr sz="1200" b="0" i="0" u="none" strike="noStrike" cap="none" spc="0" baseline="0">
           <a:solidFill>
             <a:schemeClr val="tx1"/>
           </a:solidFill>
@@ -2730,7 +2801,7 @@
 </file>
 
 <file path=ppt/slides/slide1.xml><?xml version="1.0" encoding="utf-8"?>
-<p:sld xmlns:a="http://schemas.openxmlformats.org/drawingml/2006/main" xmlns:r="http://schemas.openxmlformats.org/officeDocument/2006/relationships" xmlns:p="http://schemas.openxmlformats.org/presentationml/2006/main" xmlns:m="http://schemas.openxmlformats.org/officeDocument/2006/math" xmlns:a14="http://schemas.microsoft.com/office/drawing/2010/main" showMasterSp="1" showMasterPhAnim="1">
+<p:sld xmlns:a="http://schemas.openxmlformats.org/drawingml/2006/main" xmlns:r="http://schemas.openxmlformats.org/officeDocument/2006/relationships" xmlns:p="http://schemas.openxmlformats.org/presentationml/2006/main">
   <p:cSld>
     <p:spTree>
       <p:nvGrpSpPr>
@@ -2767,7 +2838,7 @@
             <a:miter lim="400000"/>
           </a:ln>
           <a:effectLst>
-            <a:outerShdw sx="100000" sy="100000" kx="0" ky="0" algn="b" rotWithShape="0" blurRad="38100" dist="23000" dir="5400000">
+            <a:outerShdw blurRad="38100" dist="23000" dir="5400000" rotWithShape="0">
               <a:srgbClr val="000000">
                 <a:alpha val="35000"/>
               </a:srgbClr>
@@ -2785,6 +2856,7 @@
                 </a:solidFill>
               </a:defRPr>
             </a:pPr>
+            <a:endParaRPr/>
           </a:p>
         </p:txBody>
       </p:sp>
@@ -2807,7 +2879,7 @@
           </a:ln>
           <a:extLst>
             <a:ext uri="{C572A759-6A51-4108-AA02-DFA0A04FC94B}">
-              <ma14:wrappingTextBoxFlag xmlns:ma14="http://schemas.microsoft.com/office/mac/drawingml/2011/main" val="1"/>
+              <ma14:wrappingTextBoxFlag xmlns:ma14="http://schemas.microsoft.com/office/mac/drawingml/2011/main" xmlns:a14="http://schemas.microsoft.com/office/drawing/2010/main" xmlns:m="http://schemas.openxmlformats.org/officeDocument/2006/math" xmlns="" val="1"/>
             </a:ext>
           </a:extLst>
         </p:spPr>
@@ -2825,7 +2897,6 @@
             </a:lvl1pPr>
           </a:lstStyle>
           <a:p>
-            <a:pPr/>
             <a:r>
               <a:t>Module 2: Line Tracking</a:t>
             </a:r>
@@ -2851,7 +2922,7 @@
           </a:ln>
           <a:extLst>
             <a:ext uri="{C572A759-6A51-4108-AA02-DFA0A04FC94B}">
-              <ma14:wrappingTextBoxFlag xmlns:ma14="http://schemas.microsoft.com/office/mac/drawingml/2011/main" val="1"/>
+              <ma14:wrappingTextBoxFlag xmlns:ma14="http://schemas.microsoft.com/office/mac/drawingml/2011/main" xmlns:a14="http://schemas.microsoft.com/office/drawing/2010/main" xmlns:m="http://schemas.openxmlformats.org/officeDocument/2006/math" xmlns="" val="1"/>
             </a:ext>
           </a:extLst>
         </p:spPr>
@@ -2861,7 +2932,7 @@
           </a:bodyPr>
           <a:lstStyle>
             <a:lvl1pPr>
-              <a:defRPr b="1" sz="4200">
+              <a:defRPr sz="4200" b="1">
                 <a:solidFill>
                   <a:srgbClr val="FFFFFF"/>
                 </a:solidFill>
@@ -2869,7 +2940,6 @@
             </a:lvl1pPr>
           </a:lstStyle>
           <a:p>
-            <a:pPr/>
             <a:r>
               <a:t>The Reflectance Sensor</a:t>
             </a:r>
@@ -2895,7 +2965,7 @@
           </a:ln>
           <a:extLst>
             <a:ext uri="{C572A759-6A51-4108-AA02-DFA0A04FC94B}">
-              <ma14:wrappingTextBoxFlag xmlns:ma14="http://schemas.microsoft.com/office/mac/drawingml/2011/main" val="1"/>
+              <ma14:wrappingTextBoxFlag xmlns:ma14="http://schemas.microsoft.com/office/mac/drawingml/2011/main" xmlns:a14="http://schemas.microsoft.com/office/drawing/2010/main" xmlns:m="http://schemas.openxmlformats.org/officeDocument/2006/math" xmlns="" val="1"/>
             </a:ext>
           </a:extLst>
         </p:spPr>
@@ -2906,7 +2976,7 @@
           <a:lstStyle/>
           <a:p>
             <a:pPr>
-              <a:defRPr b="1" sz="2400">
+              <a:defRPr sz="2400" b="1">
                 <a:solidFill>
                   <a:srgbClr val="1B3A5C"/>
                 </a:solidFill>
@@ -2997,7 +3067,7 @@
           </a:ln>
           <a:extLst>
             <a:ext uri="{C572A759-6A51-4108-AA02-DFA0A04FC94B}">
-              <ma14:wrappingTextBoxFlag xmlns:ma14="http://schemas.microsoft.com/office/mac/drawingml/2011/main" val="1"/>
+              <ma14:wrappingTextBoxFlag xmlns:ma14="http://schemas.microsoft.com/office/mac/drawingml/2011/main" xmlns:a14="http://schemas.microsoft.com/office/drawing/2010/main" xmlns:m="http://schemas.openxmlformats.org/officeDocument/2006/math" xmlns="" val="1"/>
             </a:ext>
           </a:extLst>
         </p:spPr>
@@ -3008,7 +3078,7 @@
           <a:lstStyle/>
           <a:p>
             <a:pPr>
-              <a:defRPr b="1" sz="2400">
+              <a:defRPr sz="2400" b="1">
                 <a:solidFill>
                   <a:srgbClr val="1B3A5C"/>
                 </a:solidFill>
@@ -3070,12 +3140,12 @@
   <p:clrMapOvr>
     <a:masterClrMapping/>
   </p:clrMapOvr>
-  <p:transition xmlns:p14="http://schemas.microsoft.com/office/powerpoint/2010/main" spd="med" advClick="1"/>
+  <p:transition spd="med"/>
 </p:sld>
 </file>
 
 <file path=ppt/slides/slide10.xml><?xml version="1.0" encoding="utf-8"?>
-<p:sld xmlns:a="http://schemas.openxmlformats.org/drawingml/2006/main" xmlns:r="http://schemas.openxmlformats.org/officeDocument/2006/relationships" xmlns:p="http://schemas.openxmlformats.org/presentationml/2006/main" xmlns:m="http://schemas.openxmlformats.org/officeDocument/2006/math" xmlns:a14="http://schemas.microsoft.com/office/drawing/2010/main" showMasterSp="1" showMasterPhAnim="1">
+<p:sld xmlns:a="http://schemas.openxmlformats.org/drawingml/2006/main" xmlns:r="http://schemas.openxmlformats.org/officeDocument/2006/relationships" xmlns:p="http://schemas.openxmlformats.org/presentationml/2006/main">
   <p:cSld>
     <p:spTree>
       <p:nvGrpSpPr>
@@ -3112,7 +3182,7 @@
             <a:miter lim="400000"/>
           </a:ln>
           <a:effectLst>
-            <a:outerShdw sx="100000" sy="100000" kx="0" ky="0" algn="b" rotWithShape="0" blurRad="38100" dist="23000" dir="5400000">
+            <a:outerShdw blurRad="38100" dist="23000" dir="5400000" rotWithShape="0">
               <a:srgbClr val="000000">
                 <a:alpha val="35000"/>
               </a:srgbClr>
@@ -3130,6 +3200,7 @@
                 </a:solidFill>
               </a:defRPr>
             </a:pPr>
+            <a:endParaRPr/>
           </a:p>
         </p:txBody>
       </p:sp>
@@ -3152,7 +3223,7 @@
           </a:ln>
           <a:extLst>
             <a:ext uri="{C572A759-6A51-4108-AA02-DFA0A04FC94B}">
-              <ma14:wrappingTextBoxFlag xmlns:ma14="http://schemas.microsoft.com/office/mac/drawingml/2011/main" val="1"/>
+              <ma14:wrappingTextBoxFlag xmlns:ma14="http://schemas.microsoft.com/office/mac/drawingml/2011/main" xmlns:a14="http://schemas.microsoft.com/office/drawing/2010/main" xmlns:m="http://schemas.openxmlformats.org/officeDocument/2006/math" xmlns="" val="1"/>
             </a:ext>
           </a:extLst>
         </p:spPr>
@@ -3162,7 +3233,7 @@
           </a:bodyPr>
           <a:lstStyle>
             <a:lvl1pPr>
-              <a:defRPr b="1" sz="3200">
+              <a:defRPr sz="3200" b="1">
                 <a:solidFill>
                   <a:srgbClr val="FFFFFF"/>
                 </a:solidFill>
@@ -3170,7 +3241,6 @@
             </a:lvl1pPr>
           </a:lstStyle>
           <a:p>
-            <a:pPr/>
             <a:r>
               <a:t>Connection to Next Lesson</a:t>
             </a:r>
@@ -3196,7 +3266,7 @@
           </a:ln>
           <a:extLst>
             <a:ext uri="{C572A759-6A51-4108-AA02-DFA0A04FC94B}">
-              <ma14:wrappingTextBoxFlag xmlns:ma14="http://schemas.microsoft.com/office/mac/drawingml/2011/main" val="1"/>
+              <ma14:wrappingTextBoxFlag xmlns:ma14="http://schemas.microsoft.com/office/mac/drawingml/2011/main" xmlns:a14="http://schemas.microsoft.com/office/drawing/2010/main" xmlns:m="http://schemas.openxmlformats.org/officeDocument/2006/math" xmlns="" val="1"/>
             </a:ext>
           </a:extLst>
         </p:spPr>
@@ -3210,7 +3280,7 @@
               <a:spcBef>
                 <a:spcPts val="400"/>
               </a:spcBef>
-              <a:defRPr b="1" sz="2000">
+              <a:defRPr sz="2000" b="1">
                 <a:solidFill>
                   <a:srgbClr val="1B3A5C"/>
                 </a:solidFill>
@@ -3260,13 +3330,14 @@
               </a:spcBef>
               <a:defRPr sz="400"/>
             </a:pPr>
+            <a:endParaRPr/>
           </a:p>
           <a:p>
             <a:pPr>
               <a:spcBef>
                 <a:spcPts val="400"/>
               </a:spcBef>
-              <a:defRPr b="1" sz="2000">
+              <a:defRPr sz="2000" b="1">
                 <a:solidFill>
                   <a:srgbClr val="1B3A5C"/>
                 </a:solidFill>
@@ -3316,13 +3387,14 @@
               </a:spcBef>
               <a:defRPr sz="400"/>
             </a:pPr>
+            <a:endParaRPr/>
           </a:p>
           <a:p>
             <a:pPr>
               <a:spcBef>
                 <a:spcPts val="400"/>
               </a:spcBef>
-              <a:defRPr b="1" sz="2000">
+              <a:defRPr sz="2000" b="1">
                 <a:solidFill>
                   <a:srgbClr val="1B3A5C"/>
                 </a:solidFill>
@@ -3339,12 +3411,12 @@
   <p:clrMapOvr>
     <a:masterClrMapping/>
   </p:clrMapOvr>
-  <p:transition xmlns:p14="http://schemas.microsoft.com/office/powerpoint/2010/main" spd="med" advClick="1"/>
+  <p:transition spd="med"/>
 </p:sld>
 </file>
 
 <file path=ppt/slides/slide2.xml><?xml version="1.0" encoding="utf-8"?>
-<p:sld xmlns:a="http://schemas.openxmlformats.org/drawingml/2006/main" xmlns:r="http://schemas.openxmlformats.org/officeDocument/2006/relationships" xmlns:p="http://schemas.openxmlformats.org/presentationml/2006/main" xmlns:m="http://schemas.openxmlformats.org/officeDocument/2006/math" xmlns:a14="http://schemas.microsoft.com/office/drawing/2010/main" showMasterSp="1" showMasterPhAnim="1">
+<p:sld xmlns:a="http://schemas.openxmlformats.org/drawingml/2006/main" xmlns:r="http://schemas.openxmlformats.org/officeDocument/2006/relationships" xmlns:p="http://schemas.openxmlformats.org/presentationml/2006/main">
   <p:cSld>
     <p:spTree>
       <p:nvGrpSpPr>
@@ -3381,7 +3453,7 @@
             <a:miter lim="400000"/>
           </a:ln>
           <a:effectLst>
-            <a:outerShdw sx="100000" sy="100000" kx="0" ky="0" algn="b" rotWithShape="0" blurRad="38100" dist="23000" dir="5400000">
+            <a:outerShdw blurRad="38100" dist="23000" dir="5400000" rotWithShape="0">
               <a:srgbClr val="000000">
                 <a:alpha val="35000"/>
               </a:srgbClr>
@@ -3399,6 +3471,7 @@
                 </a:solidFill>
               </a:defRPr>
             </a:pPr>
+            <a:endParaRPr/>
           </a:p>
         </p:txBody>
       </p:sp>
@@ -3421,7 +3494,7 @@
           </a:ln>
           <a:extLst>
             <a:ext uri="{C572A759-6A51-4108-AA02-DFA0A04FC94B}">
-              <ma14:wrappingTextBoxFlag xmlns:ma14="http://schemas.microsoft.com/office/mac/drawingml/2011/main" val="1"/>
+              <ma14:wrappingTextBoxFlag xmlns:ma14="http://schemas.microsoft.com/office/mac/drawingml/2011/main" xmlns:a14="http://schemas.microsoft.com/office/drawing/2010/main" xmlns:m="http://schemas.openxmlformats.org/officeDocument/2006/math" xmlns="" val="1"/>
             </a:ext>
           </a:extLst>
         </p:spPr>
@@ -3431,7 +3504,7 @@
           </a:bodyPr>
           <a:lstStyle>
             <a:lvl1pPr>
-              <a:defRPr b="1" sz="3200">
+              <a:defRPr sz="3200" b="1">
                 <a:solidFill>
                   <a:srgbClr val="FFFFFF"/>
                 </a:solidFill>
@@ -3439,7 +3512,6 @@
             </a:lvl1pPr>
           </a:lstStyle>
           <a:p>
-            <a:pPr/>
             <a:r>
               <a:t>Hook — How Does a Robot "See"?</a:t>
             </a:r>
@@ -3465,7 +3537,7 @@
           </a:ln>
           <a:extLst>
             <a:ext uri="{C572A759-6A51-4108-AA02-DFA0A04FC94B}">
-              <ma14:wrappingTextBoxFlag xmlns:ma14="http://schemas.microsoft.com/office/mac/drawingml/2011/main" val="1"/>
+              <ma14:wrappingTextBoxFlag xmlns:ma14="http://schemas.microsoft.com/office/mac/drawingml/2011/main" xmlns:a14="http://schemas.microsoft.com/office/drawing/2010/main" xmlns:m="http://schemas.openxmlformats.org/officeDocument/2006/math" xmlns="" val="1"/>
             </a:ext>
           </a:extLst>
         </p:spPr>
@@ -3479,7 +3551,7 @@
               <a:spcBef>
                 <a:spcPts val="400"/>
               </a:spcBef>
-              <a:defRPr b="1" sz="2000">
+              <a:defRPr sz="2000" b="1">
                 <a:solidFill>
                   <a:srgbClr val="1B3A5C"/>
                 </a:solidFill>
@@ -3496,13 +3568,14 @@
               </a:spcBef>
               <a:defRPr sz="400"/>
             </a:pPr>
+            <a:endParaRPr/>
           </a:p>
           <a:p>
             <a:pPr>
               <a:spcBef>
                 <a:spcPts val="400"/>
               </a:spcBef>
-              <a:defRPr b="1" sz="2000">
+              <a:defRPr sz="2000" b="1">
                 <a:solidFill>
                   <a:srgbClr val="1B3A5C"/>
                 </a:solidFill>
@@ -3519,13 +3592,14 @@
               </a:spcBef>
               <a:defRPr sz="400"/>
             </a:pPr>
+            <a:endParaRPr/>
           </a:p>
           <a:p>
             <a:pPr>
               <a:spcBef>
                 <a:spcPts val="400"/>
               </a:spcBef>
-              <a:defRPr b="1" sz="2000">
+              <a:defRPr sz="2000" b="1">
                 <a:solidFill>
                   <a:srgbClr val="1B3A5C"/>
                 </a:solidFill>
@@ -3542,12 +3616,12 @@
   <p:clrMapOvr>
     <a:masterClrMapping/>
   </p:clrMapOvr>
-  <p:transition xmlns:p14="http://schemas.microsoft.com/office/powerpoint/2010/main" spd="med" advClick="1"/>
+  <p:transition spd="med"/>
 </p:sld>
 </file>
 
 <file path=ppt/slides/slide3.xml><?xml version="1.0" encoding="utf-8"?>
-<p:sld xmlns:a="http://schemas.openxmlformats.org/drawingml/2006/main" xmlns:r="http://schemas.openxmlformats.org/officeDocument/2006/relationships" xmlns:p="http://schemas.openxmlformats.org/presentationml/2006/main" xmlns:m="http://schemas.openxmlformats.org/officeDocument/2006/math" xmlns:a14="http://schemas.microsoft.com/office/drawing/2010/main" showMasterSp="1" showMasterPhAnim="1">
+<p:sld xmlns:a="http://schemas.openxmlformats.org/drawingml/2006/main" xmlns:r="http://schemas.openxmlformats.org/officeDocument/2006/relationships" xmlns:p="http://schemas.openxmlformats.org/presentationml/2006/main">
   <p:cSld>
     <p:spTree>
       <p:nvGrpSpPr>
@@ -3584,7 +3658,7 @@
             <a:miter lim="400000"/>
           </a:ln>
           <a:effectLst>
-            <a:outerShdw sx="100000" sy="100000" kx="0" ky="0" algn="b" rotWithShape="0" blurRad="38100" dist="23000" dir="5400000">
+            <a:outerShdw blurRad="38100" dist="23000" dir="5400000" rotWithShape="0">
               <a:srgbClr val="000000">
                 <a:alpha val="35000"/>
               </a:srgbClr>
@@ -3602,6 +3676,7 @@
                 </a:solidFill>
               </a:defRPr>
             </a:pPr>
+            <a:endParaRPr/>
           </a:p>
         </p:txBody>
       </p:sp>
@@ -3624,7 +3699,7 @@
           </a:ln>
           <a:extLst>
             <a:ext uri="{C572A759-6A51-4108-AA02-DFA0A04FC94B}">
-              <ma14:wrappingTextBoxFlag xmlns:ma14="http://schemas.microsoft.com/office/mac/drawingml/2011/main" val="1"/>
+              <ma14:wrappingTextBoxFlag xmlns:ma14="http://schemas.microsoft.com/office/mac/drawingml/2011/main" xmlns:a14="http://schemas.microsoft.com/office/drawing/2010/main" xmlns:m="http://schemas.openxmlformats.org/officeDocument/2006/math" xmlns="" val="1"/>
             </a:ext>
           </a:extLst>
         </p:spPr>
@@ -3634,7 +3709,7 @@
           </a:bodyPr>
           <a:lstStyle>
             <a:lvl1pPr>
-              <a:defRPr b="1" sz="3200">
+              <a:defRPr sz="3200" b="1">
                 <a:solidFill>
                   <a:srgbClr val="FFFFFF"/>
                 </a:solidFill>
@@ -3642,7 +3717,6 @@
             </a:lvl1pPr>
           </a:lstStyle>
           <a:p>
-            <a:pPr/>
             <a:r>
               <a:t>How Reflectance Sensors Work</a:t>
             </a:r>
@@ -3668,7 +3742,7 @@
           </a:ln>
           <a:extLst>
             <a:ext uri="{C572A759-6A51-4108-AA02-DFA0A04FC94B}">
-              <ma14:wrappingTextBoxFlag xmlns:ma14="http://schemas.microsoft.com/office/mac/drawingml/2011/main" val="1"/>
+              <ma14:wrappingTextBoxFlag xmlns:ma14="http://schemas.microsoft.com/office/mac/drawingml/2011/main" xmlns:a14="http://schemas.microsoft.com/office/drawing/2010/main" xmlns:m="http://schemas.openxmlformats.org/officeDocument/2006/math" xmlns="" val="1"/>
             </a:ext>
           </a:extLst>
         </p:spPr>
@@ -3682,7 +3756,7 @@
               <a:spcBef>
                 <a:spcPts val="400"/>
               </a:spcBef>
-              <a:defRPr b="1" sz="2000">
+              <a:defRPr sz="2000" b="1">
                 <a:solidFill>
                   <a:srgbClr val="1B3A5C"/>
                 </a:solidFill>
@@ -3721,13 +3795,14 @@
               </a:spcBef>
               <a:defRPr sz="400"/>
             </a:pPr>
+            <a:endParaRPr/>
           </a:p>
           <a:p>
             <a:pPr>
               <a:spcBef>
                 <a:spcPts val="400"/>
               </a:spcBef>
-              <a:defRPr b="1" sz="2000">
+              <a:defRPr sz="2000" b="1">
                 <a:solidFill>
                   <a:srgbClr val="1B3A5C"/>
                 </a:solidFill>
@@ -3742,7 +3817,7 @@
               <a:spcBef>
                 <a:spcPts val="400"/>
               </a:spcBef>
-              <a:defRPr b="1" sz="2000">
+              <a:defRPr sz="2000" b="1">
                 <a:solidFill>
                   <a:srgbClr val="1B3A5C"/>
                 </a:solidFill>
@@ -3759,13 +3834,14 @@
               </a:spcBef>
               <a:defRPr sz="400"/>
             </a:pPr>
+            <a:endParaRPr/>
           </a:p>
           <a:p>
             <a:pPr>
               <a:spcBef>
                 <a:spcPts val="400"/>
               </a:spcBef>
-              <a:defRPr b="1" sz="2000">
+              <a:defRPr sz="2000" b="1">
                 <a:solidFill>
                   <a:srgbClr val="1B3A5C"/>
                 </a:solidFill>
@@ -3782,13 +3858,14 @@
               </a:spcBef>
               <a:defRPr sz="400"/>
             </a:pPr>
+            <a:endParaRPr/>
           </a:p>
           <a:p>
             <a:pPr>
               <a:spcBef>
                 <a:spcPts val="400"/>
               </a:spcBef>
-              <a:defRPr b="1" sz="2000">
+              <a:defRPr sz="2000" b="1">
                 <a:solidFill>
                   <a:srgbClr val="1B3A5C"/>
                 </a:solidFill>
@@ -3805,12 +3882,12 @@
   <p:clrMapOvr>
     <a:masterClrMapping/>
   </p:clrMapOvr>
-  <p:transition xmlns:p14="http://schemas.microsoft.com/office/powerpoint/2010/main" spd="med" advClick="1"/>
+  <p:transition spd="med"/>
 </p:sld>
 </file>
 
 <file path=ppt/slides/slide4.xml><?xml version="1.0" encoding="utf-8"?>
-<p:sld xmlns:a="http://schemas.openxmlformats.org/drawingml/2006/main" xmlns:r="http://schemas.openxmlformats.org/officeDocument/2006/relationships" xmlns:p="http://schemas.openxmlformats.org/presentationml/2006/main" xmlns:m="http://schemas.openxmlformats.org/officeDocument/2006/math" xmlns:a14="http://schemas.microsoft.com/office/drawing/2010/main" showMasterSp="1" showMasterPhAnim="1">
+<p:sld xmlns:a="http://schemas.openxmlformats.org/drawingml/2006/main" xmlns:r="http://schemas.openxmlformats.org/officeDocument/2006/relationships" xmlns:p="http://schemas.openxmlformats.org/presentationml/2006/main">
   <p:cSld>
     <p:spTree>
       <p:nvGrpSpPr>
@@ -3847,7 +3924,7 @@
             <a:miter lim="400000"/>
           </a:ln>
           <a:effectLst>
-            <a:outerShdw sx="100000" sy="100000" kx="0" ky="0" algn="b" rotWithShape="0" blurRad="38100" dist="23000" dir="5400000">
+            <a:outerShdw blurRad="38100" dist="23000" dir="5400000" rotWithShape="0">
               <a:srgbClr val="000000">
                 <a:alpha val="35000"/>
               </a:srgbClr>
@@ -3865,6 +3942,7 @@
                 </a:solidFill>
               </a:defRPr>
             </a:pPr>
+            <a:endParaRPr/>
           </a:p>
         </p:txBody>
       </p:sp>
@@ -3887,7 +3965,7 @@
           </a:ln>
           <a:extLst>
             <a:ext uri="{C572A759-6A51-4108-AA02-DFA0A04FC94B}">
-              <ma14:wrappingTextBoxFlag xmlns:ma14="http://schemas.microsoft.com/office/mac/drawingml/2011/main" val="1"/>
+              <ma14:wrappingTextBoxFlag xmlns:ma14="http://schemas.microsoft.com/office/mac/drawingml/2011/main" xmlns:a14="http://schemas.microsoft.com/office/drawing/2010/main" xmlns:m="http://schemas.openxmlformats.org/officeDocument/2006/math" xmlns="" val="1"/>
             </a:ext>
           </a:extLst>
         </p:spPr>
@@ -3897,7 +3975,7 @@
           </a:bodyPr>
           <a:lstStyle>
             <a:lvl1pPr>
-              <a:defRPr b="1" sz="3200">
+              <a:defRPr sz="3200" b="1">
                 <a:solidFill>
                   <a:srgbClr val="FFFFFF"/>
                 </a:solidFill>
@@ -3905,7 +3983,6 @@
             </a:lvl1pPr>
           </a:lstStyle>
           <a:p>
-            <a:pPr/>
             <a:r>
               <a:t>Sensor Value Range</a:t>
             </a:r>
@@ -3931,7 +4008,7 @@
           </a:ln>
           <a:extLst>
             <a:ext uri="{C572A759-6A51-4108-AA02-DFA0A04FC94B}">
-              <ma14:wrappingTextBoxFlag xmlns:ma14="http://schemas.microsoft.com/office/mac/drawingml/2011/main" val="1"/>
+              <ma14:wrappingTextBoxFlag xmlns:ma14="http://schemas.microsoft.com/office/mac/drawingml/2011/main" xmlns:a14="http://schemas.microsoft.com/office/drawing/2010/main" xmlns:m="http://schemas.openxmlformats.org/officeDocument/2006/math" xmlns="" val="1"/>
             </a:ext>
           </a:extLst>
         </p:spPr>
@@ -3952,7 +4029,6 @@
             </a:lvl1pPr>
           </a:lstStyle>
           <a:p>
-            <a:pPr/>
             <a:r>
               <a:t>Values range from 0.0 to 1.0:</a:t>
             </a:r>
@@ -3963,22 +4039,46 @@
         <p:nvGraphicFramePr>
           <p:cNvPr id="111" name="Table 4"/>
           <p:cNvGraphicFramePr/>
-          <p:nvPr/>
+          <p:nvPr>
+            <p:extLst>
+              <p:ext uri="{D42A27DB-BD31-4B8C-83A1-F6EECF244321}">
+                <p14:modId xmlns:p14="http://schemas.microsoft.com/office/powerpoint/2010/main" val="19824070"/>
+              </p:ext>
+            </p:extLst>
+          </p:nvPr>
         </p:nvGraphicFramePr>
         <p:xfrm>
-          <a:off x="914400" y="1371600"/>
+          <a:off x="893135" y="1868861"/>
           <a:ext cx="10058400" cy="1463040"/>
         </p:xfrm>
-        <a:graphic xmlns:a="http://schemas.openxmlformats.org/drawingml/2006/main">
+        <a:graphic>
           <a:graphicData uri="http://schemas.openxmlformats.org/drawingml/2006/table">
             <a:tbl>
-              <a:tblPr firstCol="0" firstRow="1" lastCol="0" lastRow="0" bandCol="0" bandRow="1" rtl="0">
+              <a:tblPr firstRow="1" bandRow="1">
                 <a:tableStyleId>{4C3C2611-4C71-4FC5-86AE-919BDF0F9419}</a:tableStyleId>
               </a:tblPr>
               <a:tblGrid>
-                <a:gridCol w="3352800"/>
-                <a:gridCol w="3352800"/>
-                <a:gridCol w="3352800"/>
+                <a:gridCol w="3352800">
+                  <a:extLst>
+                    <a:ext uri="{9D8B030D-6E8A-4147-A177-3AD203B41FA5}">
+                      <a16:colId xmlns:a16="http://schemas.microsoft.com/office/drawing/2014/main" val="20000"/>
+                    </a:ext>
+                  </a:extLst>
+                </a:gridCol>
+                <a:gridCol w="3352800">
+                  <a:extLst>
+                    <a:ext uri="{9D8B030D-6E8A-4147-A177-3AD203B41FA5}">
+                      <a16:colId xmlns:a16="http://schemas.microsoft.com/office/drawing/2014/main" val="20001"/>
+                    </a:ext>
+                  </a:extLst>
+                </a:gridCol>
+                <a:gridCol w="3352800">
+                  <a:extLst>
+                    <a:ext uri="{9D8B030D-6E8A-4147-A177-3AD203B41FA5}">
+                      <a16:colId xmlns:a16="http://schemas.microsoft.com/office/drawing/2014/main" val="20002"/>
+                    </a:ext>
+                  </a:extLst>
+                </a:gridCol>
               </a:tblGrid>
               <a:tr h="365760">
                 <a:tc>
@@ -3987,14 +4087,14 @@
                     <a:lstStyle/>
                     <a:p>
                       <a:pPr algn="ctr">
-                        <a:defRPr b="0" sz="1800">
+                        <a:defRPr sz="1800" b="0">
                           <a:solidFill>
                             <a:srgbClr val="000000"/>
                           </a:solidFill>
                         </a:defRPr>
                       </a:pPr>
                       <a:r>
-                        <a:rPr b="1" sz="1400">
+                        <a:rPr sz="1400" b="1" dirty="0">
                           <a:solidFill>
                             <a:srgbClr val="FFFFFF"/>
                           </a:solidFill>
@@ -4003,7 +4103,7 @@
                       </a:r>
                     </a:p>
                   </a:txBody>
-                  <a:tcPr marL="45720" marR="45720" marT="45720" marB="45720" anchor="t" anchorCtr="0" horzOverflow="overflow">
+                  <a:tcPr marL="45720" marR="45720" horzOverflow="overflow">
                     <a:solidFill>
                       <a:srgbClr val="2E75B6"/>
                     </a:solidFill>
@@ -4015,14 +4115,14 @@
                     <a:lstStyle/>
                     <a:p>
                       <a:pPr algn="ctr">
-                        <a:defRPr b="0" sz="1800">
+                        <a:defRPr sz="1800" b="0">
                           <a:solidFill>
                             <a:srgbClr val="000000"/>
                           </a:solidFill>
                         </a:defRPr>
                       </a:pPr>
                       <a:r>
-                        <a:rPr b="1" sz="1400">
+                        <a:rPr sz="1400" b="1">
                           <a:solidFill>
                             <a:srgbClr val="FFFFFF"/>
                           </a:solidFill>
@@ -4031,7 +4131,7 @@
                       </a:r>
                     </a:p>
                   </a:txBody>
-                  <a:tcPr marL="45720" marR="45720" marT="45720" marB="45720" anchor="t" anchorCtr="0" horzOverflow="overflow">
+                  <a:tcPr marL="45720" marR="45720" horzOverflow="overflow">
                     <a:solidFill>
                       <a:srgbClr val="2E75B6"/>
                     </a:solidFill>
@@ -4043,14 +4143,14 @@
                     <a:lstStyle/>
                     <a:p>
                       <a:pPr algn="ctr">
-                        <a:defRPr b="0" sz="1800">
+                        <a:defRPr sz="1800" b="0">
                           <a:solidFill>
                             <a:srgbClr val="000000"/>
                           </a:solidFill>
                         </a:defRPr>
                       </a:pPr>
                       <a:r>
-                        <a:rPr b="1" sz="1400">
+                        <a:rPr sz="1400" b="1">
                           <a:solidFill>
                             <a:srgbClr val="FFFFFF"/>
                           </a:solidFill>
@@ -4059,12 +4159,17 @@
                       </a:r>
                     </a:p>
                   </a:txBody>
-                  <a:tcPr marL="45720" marR="45720" marT="45720" marB="45720" anchor="t" anchorCtr="0" horzOverflow="overflow">
+                  <a:tcPr marL="45720" marR="45720" horzOverflow="overflow">
                     <a:solidFill>
                       <a:srgbClr val="2E75B6"/>
                     </a:solidFill>
                   </a:tcPr>
                 </a:tc>
+                <a:extLst>
+                  <a:ext uri="{0D108BD9-81ED-4DB2-BD59-A6C34878D82A}">
+                    <a16:rowId xmlns:a16="http://schemas.microsoft.com/office/drawing/2014/main" val="10000"/>
+                  </a:ext>
+                </a:extLst>
               </a:tr>
               <a:tr h="365760">
                 <a:tc>
@@ -4076,12 +4181,12 @@
                         <a:defRPr sz="1800"/>
                       </a:pPr>
                       <a:r>
-                        <a:rPr sz="1300"/>
+                        <a:rPr sz="1300" dirty="0"/>
                         <a:t>On white surface</a:t>
                       </a:r>
                     </a:p>
                   </a:txBody>
-                  <a:tcPr marL="45720" marR="45720" marT="45720" marB="45720" anchor="t" anchorCtr="0" horzOverflow="overflow"/>
+                  <a:tcPr marL="45720" marR="45720" horzOverflow="overflow"/>
                 </a:tc>
                 <a:tc>
                   <a:txBody>
@@ -4097,7 +4202,7 @@
                       </a:r>
                     </a:p>
                   </a:txBody>
-                  <a:tcPr marL="45720" marR="45720" marT="45720" marB="45720" anchor="t" anchorCtr="0" horzOverflow="overflow"/>
+                  <a:tcPr marL="45720" marR="45720" horzOverflow="overflow"/>
                 </a:tc>
                 <a:tc>
                   <a:txBody>
@@ -4113,8 +4218,13 @@
                       </a:r>
                     </a:p>
                   </a:txBody>
-                  <a:tcPr marL="45720" marR="45720" marT="45720" marB="45720" anchor="t" anchorCtr="0" horzOverflow="overflow"/>
+                  <a:tcPr marL="45720" marR="45720" horzOverflow="overflow"/>
                 </a:tc>
+                <a:extLst>
+                  <a:ext uri="{0D108BD9-81ED-4DB2-BD59-A6C34878D82A}">
+                    <a16:rowId xmlns:a16="http://schemas.microsoft.com/office/drawing/2014/main" val="10001"/>
+                  </a:ext>
+                </a:extLst>
               </a:tr>
               <a:tr h="365760">
                 <a:tc>
@@ -4131,7 +4241,7 @@
                       </a:r>
                     </a:p>
                   </a:txBody>
-                  <a:tcPr marL="45720" marR="45720" marT="45720" marB="45720" anchor="t" anchorCtr="0" horzOverflow="overflow">
+                  <a:tcPr marL="45720" marR="45720" horzOverflow="overflow">
                     <a:solidFill>
                       <a:srgbClr val="E8F0F8"/>
                     </a:solidFill>
@@ -4151,7 +4261,7 @@
                       </a:r>
                     </a:p>
                   </a:txBody>
-                  <a:tcPr marL="45720" marR="45720" marT="45720" marB="45720" anchor="t" anchorCtr="0" horzOverflow="overflow">
+                  <a:tcPr marL="45720" marR="45720" horzOverflow="overflow">
                     <a:solidFill>
                       <a:srgbClr val="E8F0F8"/>
                     </a:solidFill>
@@ -4171,12 +4281,17 @@
                       </a:r>
                     </a:p>
                   </a:txBody>
-                  <a:tcPr marL="45720" marR="45720" marT="45720" marB="45720" anchor="t" anchorCtr="0" horzOverflow="overflow">
+                  <a:tcPr marL="45720" marR="45720" horzOverflow="overflow">
                     <a:solidFill>
                       <a:srgbClr val="E8F0F8"/>
                     </a:solidFill>
                   </a:tcPr>
                 </a:tc>
+                <a:extLst>
+                  <a:ext uri="{0D108BD9-81ED-4DB2-BD59-A6C34878D82A}">
+                    <a16:rowId xmlns:a16="http://schemas.microsoft.com/office/drawing/2014/main" val="10002"/>
+                  </a:ext>
+                </a:extLst>
               </a:tr>
               <a:tr h="365760">
                 <a:tc>
@@ -4193,7 +4308,7 @@
                       </a:r>
                     </a:p>
                   </a:txBody>
-                  <a:tcPr marL="45720" marR="45720" marT="45720" marB="45720" anchor="t" anchorCtr="0" horzOverflow="overflow"/>
+                  <a:tcPr marL="45720" marR="45720" horzOverflow="overflow"/>
                 </a:tc>
                 <a:tc>
                   <a:txBody>
@@ -4209,7 +4324,7 @@
                       </a:r>
                     </a:p>
                   </a:txBody>
-                  <a:tcPr marL="45720" marR="45720" marT="45720" marB="45720" anchor="t" anchorCtr="0" horzOverflow="overflow"/>
+                  <a:tcPr marL="45720" marR="45720" horzOverflow="overflow"/>
                 </a:tc>
                 <a:tc>
                   <a:txBody>
@@ -4220,13 +4335,18 @@
                         <a:defRPr sz="1800"/>
                       </a:pPr>
                       <a:r>
-                        <a:rPr sz="1300"/>
+                        <a:rPr sz="1300" dirty="0"/>
                         <a:t>~0.7 – 0.9</a:t>
                       </a:r>
                     </a:p>
                   </a:txBody>
-                  <a:tcPr marL="45720" marR="45720" marT="45720" marB="45720" anchor="t" anchorCtr="0" horzOverflow="overflow"/>
+                  <a:tcPr marL="45720" marR="45720" horzOverflow="overflow"/>
                 </a:tc>
+                <a:extLst>
+                  <a:ext uri="{0D108BD9-81ED-4DB2-BD59-A6C34878D82A}">
+                    <a16:rowId xmlns:a16="http://schemas.microsoft.com/office/drawing/2014/main" val="10003"/>
+                  </a:ext>
+                </a:extLst>
               </a:tr>
             </a:tbl>
           </a:graphicData>
@@ -4240,7 +4360,7 @@
         </p:nvSpPr>
         <p:spPr>
           <a:xfrm>
-            <a:off x="594360" y="3017520"/>
+            <a:off x="594359" y="3655473"/>
             <a:ext cx="10881361" cy="1062594"/>
           </a:xfrm>
           <a:prstGeom prst="rect">
@@ -4251,7 +4371,7 @@
           </a:ln>
           <a:extLst>
             <a:ext uri="{C572A759-6A51-4108-AA02-DFA0A04FC94B}">
-              <ma14:wrappingTextBoxFlag xmlns:ma14="http://schemas.microsoft.com/office/mac/drawingml/2011/main" val="1"/>
+              <ma14:wrappingTextBoxFlag xmlns:ma14="http://schemas.microsoft.com/office/mac/drawingml/2011/main" xmlns:a14="http://schemas.microsoft.com/office/drawing/2010/main" xmlns:m="http://schemas.openxmlformats.org/officeDocument/2006/math" xmlns="" val="1"/>
             </a:ext>
           </a:extLst>
         </p:spPr>
@@ -4272,6 +4392,7 @@
               </a:defRPr>
             </a:pPr>
             <a:r>
+              <a:rPr dirty="0"/>
               <a:t>Key idea: The transition from white to black is GRADUAL, not sudden.</a:t>
             </a:r>
           </a:p>
@@ -4282,6 +4403,7 @@
               </a:spcBef>
               <a:defRPr sz="400"/>
             </a:pPr>
+            <a:endParaRPr dirty="0"/>
           </a:p>
           <a:p>
             <a:pPr>
@@ -4291,6 +4413,7 @@
               <a:defRPr sz="1600"/>
             </a:pPr>
             <a:r>
+              <a:rPr dirty="0"/>
               <a:t>The XRP has TWO sensors — left and right — each reads independently.</a:t>
             </a:r>
           </a:p>
@@ -4301,12 +4424,12 @@
   <p:clrMapOvr>
     <a:masterClrMapping/>
   </p:clrMapOvr>
-  <p:transition xmlns:p14="http://schemas.microsoft.com/office/powerpoint/2010/main" spd="med" advClick="1"/>
+  <p:transition spd="med"/>
 </p:sld>
 </file>
 
 <file path=ppt/slides/slide5.xml><?xml version="1.0" encoding="utf-8"?>
-<p:sld xmlns:a="http://schemas.openxmlformats.org/drawingml/2006/main" xmlns:r="http://schemas.openxmlformats.org/officeDocument/2006/relationships" xmlns:p="http://schemas.openxmlformats.org/presentationml/2006/main" xmlns:m="http://schemas.openxmlformats.org/officeDocument/2006/math" xmlns:a14="http://schemas.microsoft.com/office/drawing/2010/main" showMasterSp="1" showMasterPhAnim="1">
+<p:sld xmlns:a="http://schemas.openxmlformats.org/drawingml/2006/main" xmlns:r="http://schemas.openxmlformats.org/officeDocument/2006/relationships" xmlns:p="http://schemas.openxmlformats.org/presentationml/2006/main">
   <p:cSld>
     <p:spTree>
       <p:nvGrpSpPr>
@@ -4343,7 +4466,7 @@
             <a:miter lim="400000"/>
           </a:ln>
           <a:effectLst>
-            <a:outerShdw sx="100000" sy="100000" kx="0" ky="0" algn="b" rotWithShape="0" blurRad="38100" dist="23000" dir="5400000">
+            <a:outerShdw blurRad="38100" dist="23000" dir="5400000" rotWithShape="0">
               <a:srgbClr val="000000">
                 <a:alpha val="35000"/>
               </a:srgbClr>
@@ -4361,6 +4484,7 @@
                 </a:solidFill>
               </a:defRPr>
             </a:pPr>
+            <a:endParaRPr/>
           </a:p>
         </p:txBody>
       </p:sp>
@@ -4383,7 +4507,7 @@
           </a:ln>
           <a:extLst>
             <a:ext uri="{C572A759-6A51-4108-AA02-DFA0A04FC94B}">
-              <ma14:wrappingTextBoxFlag xmlns:ma14="http://schemas.microsoft.com/office/mac/drawingml/2011/main" val="1"/>
+              <ma14:wrappingTextBoxFlag xmlns:ma14="http://schemas.microsoft.com/office/mac/drawingml/2011/main" xmlns:a14="http://schemas.microsoft.com/office/drawing/2010/main" xmlns:m="http://schemas.openxmlformats.org/officeDocument/2006/math" xmlns="" val="1"/>
             </a:ext>
           </a:extLst>
         </p:spPr>
@@ -4393,7 +4517,7 @@
           </a:bodyPr>
           <a:lstStyle>
             <a:lvl1pPr>
-              <a:defRPr b="1" sz="3200">
+              <a:defRPr sz="3200" b="1">
                 <a:solidFill>
                   <a:srgbClr val="FFFFFF"/>
                 </a:solidFill>
@@ -4401,7 +4525,6 @@
             </a:lvl1pPr>
           </a:lstStyle>
           <a:p>
-            <a:pPr/>
             <a:r>
               <a:t>Reading Sensors in Python</a:t>
             </a:r>
@@ -4427,7 +4550,7 @@
           </a:ln>
           <a:extLst>
             <a:ext uri="{C572A759-6A51-4108-AA02-DFA0A04FC94B}">
-              <ma14:wrappingTextBoxFlag xmlns:ma14="http://schemas.microsoft.com/office/mac/drawingml/2011/main" val="1"/>
+              <ma14:wrappingTextBoxFlag xmlns:ma14="http://schemas.microsoft.com/office/mac/drawingml/2011/main" xmlns:a14="http://schemas.microsoft.com/office/drawing/2010/main" xmlns:m="http://schemas.openxmlformats.org/officeDocument/2006/math" xmlns="" val="1"/>
             </a:ext>
           </a:extLst>
         </p:spPr>
@@ -4445,7 +4568,6 @@
             </a:lvl1pPr>
           </a:lstStyle>
           <a:p>
-            <a:pPr/>
             <a:r>
               <a:t>Import and setup:</a:t>
             </a:r>
@@ -4471,7 +4593,7 @@
           </a:ln>
           <a:extLst>
             <a:ext uri="{C572A759-6A51-4108-AA02-DFA0A04FC94B}">
-              <ma14:wrappingTextBoxFlag xmlns:ma14="http://schemas.microsoft.com/office/mac/drawingml/2011/main" val="1"/>
+              <ma14:wrappingTextBoxFlag xmlns:ma14="http://schemas.microsoft.com/office/mac/drawingml/2011/main" xmlns:a14="http://schemas.microsoft.com/office/drawing/2010/main" xmlns:m="http://schemas.openxmlformats.org/officeDocument/2006/math" xmlns="" val="1"/>
             </a:ext>
           </a:extLst>
         </p:spPr>
@@ -4489,7 +4611,6 @@
             </a:lvl1pPr>
           </a:lstStyle>
           <a:p>
-            <a:pPr/>
             <a:r>
               <a:t>Read values:</a:t>
             </a:r>
@@ -4515,7 +4636,7 @@
           </a:ln>
           <a:extLst>
             <a:ext uri="{C572A759-6A51-4108-AA02-DFA0A04FC94B}">
-              <ma14:wrappingTextBoxFlag xmlns:ma14="http://schemas.microsoft.com/office/mac/drawingml/2011/main" val="1"/>
+              <ma14:wrappingTextBoxFlag xmlns:ma14="http://schemas.microsoft.com/office/mac/drawingml/2011/main" xmlns:a14="http://schemas.microsoft.com/office/drawing/2010/main" xmlns:m="http://schemas.openxmlformats.org/officeDocument/2006/math" xmlns="" val="1"/>
             </a:ext>
           </a:extLst>
         </p:spPr>
@@ -4533,7 +4654,6 @@
             </a:lvl1pPr>
           </a:lstStyle>
           <a:p>
-            <a:pPr/>
             <a:r>
               <a:t>Key point: get_left() and get_right() return a number between 0.0 and 1.0.</a:t>
             </a:r>
@@ -4565,7 +4685,7 @@
             </a:solidFill>
           </a:ln>
           <a:effectLst>
-            <a:outerShdw sx="100000" sy="100000" kx="0" ky="0" algn="b" rotWithShape="0" blurRad="38100" dist="23000" dir="5400000">
+            <a:outerShdw blurRad="38100" dist="23000" dir="5400000" rotWithShape="0">
               <a:srgbClr val="000000">
                 <a:alpha val="35000"/>
               </a:srgbClr>
@@ -4583,6 +4703,7 @@
                 </a:solidFill>
               </a:defRPr>
             </a:pPr>
+            <a:endParaRPr/>
           </a:p>
         </p:txBody>
       </p:sp>
@@ -4605,7 +4726,7 @@
           </a:ln>
           <a:extLst>
             <a:ext uri="{C572A759-6A51-4108-AA02-DFA0A04FC94B}">
-              <ma14:wrappingTextBoxFlag xmlns:ma14="http://schemas.microsoft.com/office/mac/drawingml/2011/main" val="1"/>
+              <ma14:wrappingTextBoxFlag xmlns:ma14="http://schemas.microsoft.com/office/mac/drawingml/2011/main" xmlns:a14="http://schemas.microsoft.com/office/drawing/2010/main" xmlns:m="http://schemas.openxmlformats.org/officeDocument/2006/math" xmlns="" val="1"/>
             </a:ext>
           </a:extLst>
         </p:spPr>
@@ -4667,6 +4788,7 @@
                 <a:sym typeface="Courier New"/>
               </a:defRPr>
             </a:pPr>
+            <a:endParaRPr/>
           </a:p>
           <a:p>
             <a:pPr>
@@ -4733,7 +4855,7 @@
             </a:solidFill>
           </a:ln>
           <a:effectLst>
-            <a:outerShdw sx="100000" sy="100000" kx="0" ky="0" algn="b" rotWithShape="0" blurRad="38100" dist="23000" dir="5400000">
+            <a:outerShdw blurRad="38100" dist="23000" dir="5400000" rotWithShape="0">
               <a:srgbClr val="000000">
                 <a:alpha val="35000"/>
               </a:srgbClr>
@@ -4751,6 +4873,7 @@
                 </a:solidFill>
               </a:defRPr>
             </a:pPr>
+            <a:endParaRPr/>
           </a:p>
         </p:txBody>
       </p:sp>
@@ -4773,7 +4896,7 @@
           </a:ln>
           <a:extLst>
             <a:ext uri="{C572A759-6A51-4108-AA02-DFA0A04FC94B}">
-              <ma14:wrappingTextBoxFlag xmlns:ma14="http://schemas.microsoft.com/office/mac/drawingml/2011/main" val="1"/>
+              <ma14:wrappingTextBoxFlag xmlns:ma14="http://schemas.microsoft.com/office/mac/drawingml/2011/main" xmlns:a14="http://schemas.microsoft.com/office/drawing/2010/main" xmlns:m="http://schemas.openxmlformats.org/officeDocument/2006/math" xmlns="" val="1"/>
             </a:ext>
           </a:extLst>
         </p:spPr>
@@ -4865,12 +4988,12 @@
   <p:clrMapOvr>
     <a:masterClrMapping/>
   </p:clrMapOvr>
-  <p:transition xmlns:p14="http://schemas.microsoft.com/office/powerpoint/2010/main" spd="med" advClick="1"/>
+  <p:transition spd="med"/>
 </p:sld>
 </file>
 
 <file path=ppt/slides/slide6.xml><?xml version="1.0" encoding="utf-8"?>
-<p:sld xmlns:a="http://schemas.openxmlformats.org/drawingml/2006/main" xmlns:r="http://schemas.openxmlformats.org/officeDocument/2006/relationships" xmlns:p="http://schemas.openxmlformats.org/presentationml/2006/main" xmlns:m="http://schemas.openxmlformats.org/officeDocument/2006/math" xmlns:a14="http://schemas.microsoft.com/office/drawing/2010/main" showMasterSp="1" showMasterPhAnim="1">
+<p:sld xmlns:a="http://schemas.openxmlformats.org/drawingml/2006/main" xmlns:r="http://schemas.openxmlformats.org/officeDocument/2006/relationships" xmlns:p="http://schemas.openxmlformats.org/presentationml/2006/main">
   <p:cSld>
     <p:spTree>
       <p:nvGrpSpPr>
@@ -4907,7 +5030,7 @@
             <a:miter lim="400000"/>
           </a:ln>
           <a:effectLst>
-            <a:outerShdw sx="100000" sy="100000" kx="0" ky="0" algn="b" rotWithShape="0" blurRad="38100" dist="23000" dir="5400000">
+            <a:outerShdw blurRad="38100" dist="23000" dir="5400000" rotWithShape="0">
               <a:srgbClr val="000000">
                 <a:alpha val="35000"/>
               </a:srgbClr>
@@ -4925,6 +5048,7 @@
                 </a:solidFill>
               </a:defRPr>
             </a:pPr>
+            <a:endParaRPr/>
           </a:p>
         </p:txBody>
       </p:sp>
@@ -4947,7 +5071,7 @@
           </a:ln>
           <a:extLst>
             <a:ext uri="{C572A759-6A51-4108-AA02-DFA0A04FC94B}">
-              <ma14:wrappingTextBoxFlag xmlns:ma14="http://schemas.microsoft.com/office/mac/drawingml/2011/main" val="1"/>
+              <ma14:wrappingTextBoxFlag xmlns:ma14="http://schemas.microsoft.com/office/mac/drawingml/2011/main" xmlns:a14="http://schemas.microsoft.com/office/drawing/2010/main" xmlns:m="http://schemas.openxmlformats.org/officeDocument/2006/math" xmlns="" val="1"/>
             </a:ext>
           </a:extLst>
         </p:spPr>
@@ -4957,7 +5081,7 @@
           </a:bodyPr>
           <a:lstStyle>
             <a:lvl1pPr>
-              <a:defRPr b="1" sz="3200">
+              <a:defRPr sz="3200" b="1">
                 <a:solidFill>
                   <a:srgbClr val="FFFFFF"/>
                 </a:solidFill>
@@ -4965,7 +5089,6 @@
             </a:lvl1pPr>
           </a:lstStyle>
           <a:p>
-            <a:pPr/>
             <a:r>
               <a:t>Continuous Reading</a:t>
             </a:r>
@@ -4991,7 +5114,7 @@
           </a:ln>
           <a:extLst>
             <a:ext uri="{C572A759-6A51-4108-AA02-DFA0A04FC94B}">
-              <ma14:wrappingTextBoxFlag xmlns:ma14="http://schemas.microsoft.com/office/mac/drawingml/2011/main" val="1"/>
+              <ma14:wrappingTextBoxFlag xmlns:ma14="http://schemas.microsoft.com/office/mac/drawingml/2011/main" xmlns:a14="http://schemas.microsoft.com/office/drawing/2010/main" xmlns:m="http://schemas.openxmlformats.org/officeDocument/2006/math" xmlns="" val="1"/>
             </a:ext>
           </a:extLst>
         </p:spPr>
@@ -5004,7 +5127,7 @@
               <a:spcBef>
                 <a:spcPts val="400"/>
               </a:spcBef>
-              <a:defRPr b="1" sz="2000">
+              <a:defRPr sz="2000" b="1">
                 <a:solidFill>
                   <a:srgbClr val="1B3A5C"/>
                 </a:solidFill>
@@ -5012,7 +5135,6 @@
             </a:lvl1pPr>
           </a:lstStyle>
           <a:p>
-            <a:pPr/>
             <a:r>
               <a:t>Read many times in a loop:</a:t>
             </a:r>
@@ -5044,7 +5166,7 @@
             </a:solidFill>
           </a:ln>
           <a:effectLst>
-            <a:outerShdw sx="100000" sy="100000" kx="0" ky="0" algn="b" rotWithShape="0" blurRad="38100" dist="23000" dir="5400000">
+            <a:outerShdw blurRad="38100" dist="23000" dir="5400000" rotWithShape="0">
               <a:srgbClr val="000000">
                 <a:alpha val="35000"/>
               </a:srgbClr>
@@ -5062,6 +5184,7 @@
                 </a:solidFill>
               </a:defRPr>
             </a:pPr>
+            <a:endParaRPr/>
           </a:p>
         </p:txBody>
       </p:sp>
@@ -5084,7 +5207,7 @@
           </a:ln>
           <a:extLst>
             <a:ext uri="{C572A759-6A51-4108-AA02-DFA0A04FC94B}">
-              <ma14:wrappingTextBoxFlag xmlns:ma14="http://schemas.microsoft.com/office/mac/drawingml/2011/main" val="1"/>
+              <ma14:wrappingTextBoxFlag xmlns:ma14="http://schemas.microsoft.com/office/mac/drawingml/2011/main" xmlns:a14="http://schemas.microsoft.com/office/drawing/2010/main" xmlns:m="http://schemas.openxmlformats.org/officeDocument/2006/math" xmlns="" val="1"/>
             </a:ext>
           </a:extLst>
         </p:spPr>
@@ -5127,6 +5250,7 @@
                 <a:sym typeface="Courier New"/>
               </a:defRPr>
             </a:pPr>
+            <a:endParaRPr/>
           </a:p>
           <a:p>
             <a:pPr>
@@ -5162,6 +5286,7 @@
                 <a:sym typeface="Courier New"/>
               </a:defRPr>
             </a:pPr>
+            <a:endParaRPr/>
           </a:p>
           <a:p>
             <a:pPr>
@@ -5279,7 +5404,7 @@
           </a:ln>
           <a:extLst>
             <a:ext uri="{C572A759-6A51-4108-AA02-DFA0A04FC94B}">
-              <ma14:wrappingTextBoxFlag xmlns:ma14="http://schemas.microsoft.com/office/mac/drawingml/2011/main" val="1"/>
+              <ma14:wrappingTextBoxFlag xmlns:ma14="http://schemas.microsoft.com/office/mac/drawingml/2011/main" xmlns:a14="http://schemas.microsoft.com/office/drawing/2010/main" xmlns:m="http://schemas.openxmlformats.org/officeDocument/2006/math" xmlns="" val="1"/>
             </a:ext>
           </a:extLst>
         </p:spPr>
@@ -5306,6 +5431,7 @@
               </a:spcBef>
               <a:defRPr sz="400"/>
             </a:pPr>
+            <a:endParaRPr/>
           </a:p>
           <a:p>
             <a:pPr>
@@ -5325,12 +5451,12 @@
   <p:clrMapOvr>
     <a:masterClrMapping/>
   </p:clrMapOvr>
-  <p:transition xmlns:p14="http://schemas.microsoft.com/office/powerpoint/2010/main" spd="med" advClick="1"/>
+  <p:transition spd="med"/>
 </p:sld>
 </file>
 
 <file path=ppt/slides/slide7.xml><?xml version="1.0" encoding="utf-8"?>
-<p:sld xmlns:a="http://schemas.openxmlformats.org/drawingml/2006/main" xmlns:r="http://schemas.openxmlformats.org/officeDocument/2006/relationships" xmlns:p="http://schemas.openxmlformats.org/presentationml/2006/main" xmlns:m="http://schemas.openxmlformats.org/officeDocument/2006/math" xmlns:a14="http://schemas.microsoft.com/office/drawing/2010/main" showMasterSp="1" showMasterPhAnim="1">
+<p:sld xmlns:a="http://schemas.openxmlformats.org/drawingml/2006/main" xmlns:r="http://schemas.openxmlformats.org/officeDocument/2006/relationships" xmlns:p="http://schemas.openxmlformats.org/presentationml/2006/main">
   <p:cSld>
     <p:spTree>
       <p:nvGrpSpPr>
@@ -5367,7 +5493,7 @@
             <a:miter lim="400000"/>
           </a:ln>
           <a:effectLst>
-            <a:outerShdw sx="100000" sy="100000" kx="0" ky="0" algn="b" rotWithShape="0" blurRad="38100" dist="23000" dir="5400000">
+            <a:outerShdw blurRad="38100" dist="23000" dir="5400000" rotWithShape="0">
               <a:srgbClr val="000000">
                 <a:alpha val="35000"/>
               </a:srgbClr>
@@ -5385,6 +5511,7 @@
                 </a:solidFill>
               </a:defRPr>
             </a:pPr>
+            <a:endParaRPr/>
           </a:p>
         </p:txBody>
       </p:sp>
@@ -5407,7 +5534,7 @@
           </a:ln>
           <a:extLst>
             <a:ext uri="{C572A759-6A51-4108-AA02-DFA0A04FC94B}">
-              <ma14:wrappingTextBoxFlag xmlns:ma14="http://schemas.microsoft.com/office/mac/drawingml/2011/main" val="1"/>
+              <ma14:wrappingTextBoxFlag xmlns:ma14="http://schemas.microsoft.com/office/mac/drawingml/2011/main" xmlns:a14="http://schemas.microsoft.com/office/drawing/2010/main" xmlns:m="http://schemas.openxmlformats.org/officeDocument/2006/math" xmlns="" val="1"/>
             </a:ext>
           </a:extLst>
         </p:spPr>
@@ -5417,7 +5544,7 @@
           </a:bodyPr>
           <a:lstStyle>
             <a:lvl1pPr>
-              <a:defRPr b="1" sz="3200">
+              <a:defRPr sz="3200" b="1">
                 <a:solidFill>
                   <a:srgbClr val="FFFFFF"/>
                 </a:solidFill>
@@ -5425,7 +5552,6 @@
             </a:lvl1pPr>
           </a:lstStyle>
           <a:p>
-            <a:pPr/>
             <a:r>
               <a:t>What Is a Threshold?</a:t>
             </a:r>
@@ -5451,7 +5577,7 @@
           </a:ln>
           <a:extLst>
             <a:ext uri="{C572A759-6A51-4108-AA02-DFA0A04FC94B}">
-              <ma14:wrappingTextBoxFlag xmlns:ma14="http://schemas.microsoft.com/office/mac/drawingml/2011/main" val="1"/>
+              <ma14:wrappingTextBoxFlag xmlns:ma14="http://schemas.microsoft.com/office/mac/drawingml/2011/main" xmlns:a14="http://schemas.microsoft.com/office/drawing/2010/main" xmlns:m="http://schemas.openxmlformats.org/officeDocument/2006/math" xmlns="" val="1"/>
             </a:ext>
           </a:extLst>
         </p:spPr>
@@ -5465,7 +5591,7 @@
               <a:spcBef>
                 <a:spcPts val="400"/>
               </a:spcBef>
-              <a:defRPr b="1" sz="2000">
+              <a:defRPr sz="2000" b="1">
                 <a:solidFill>
                   <a:srgbClr val="1B3A5C"/>
                 </a:solidFill>
@@ -5482,13 +5608,14 @@
               </a:spcBef>
               <a:defRPr sz="400"/>
             </a:pPr>
+            <a:endParaRPr/>
           </a:p>
           <a:p>
             <a:pPr>
               <a:spcBef>
                 <a:spcPts val="400"/>
               </a:spcBef>
-              <a:defRPr b="1" sz="2000">
+              <a:defRPr sz="2000" b="1">
                 <a:solidFill>
                   <a:srgbClr val="1B3A5C"/>
                 </a:solidFill>
@@ -5538,13 +5665,14 @@
               </a:spcBef>
               <a:defRPr sz="400"/>
             </a:pPr>
+            <a:endParaRPr/>
           </a:p>
           <a:p>
             <a:pPr>
               <a:spcBef>
                 <a:spcPts val="400"/>
               </a:spcBef>
-              <a:defRPr b="1" sz="2000">
+              <a:defRPr sz="2000" b="1">
                 <a:solidFill>
                   <a:srgbClr val="1B3A5C"/>
                 </a:solidFill>
@@ -5561,13 +5689,14 @@
               </a:spcBef>
               <a:defRPr sz="400"/>
             </a:pPr>
+            <a:endParaRPr/>
           </a:p>
           <a:p>
             <a:pPr>
               <a:spcBef>
                 <a:spcPts val="400"/>
               </a:spcBef>
-              <a:defRPr b="1" sz="2000">
+              <a:defRPr sz="2000" b="1">
                 <a:solidFill>
                   <a:srgbClr val="1B3A5C"/>
                 </a:solidFill>
@@ -5584,12 +5713,12 @@
   <p:clrMapOvr>
     <a:masterClrMapping/>
   </p:clrMapOvr>
-  <p:transition xmlns:p14="http://schemas.microsoft.com/office/powerpoint/2010/main" spd="med" advClick="1"/>
+  <p:transition spd="med"/>
 </p:sld>
 </file>
 
 <file path=ppt/slides/slide8.xml><?xml version="1.0" encoding="utf-8"?>
-<p:sld xmlns:a="http://schemas.openxmlformats.org/drawingml/2006/main" xmlns:r="http://schemas.openxmlformats.org/officeDocument/2006/relationships" xmlns:p="http://schemas.openxmlformats.org/presentationml/2006/main" xmlns:m="http://schemas.openxmlformats.org/officeDocument/2006/math" xmlns:a14="http://schemas.microsoft.com/office/drawing/2010/main" showMasterSp="1" showMasterPhAnim="1">
+<p:sld xmlns:a="http://schemas.openxmlformats.org/drawingml/2006/main" xmlns:r="http://schemas.openxmlformats.org/officeDocument/2006/relationships" xmlns:p="http://schemas.openxmlformats.org/presentationml/2006/main">
   <p:cSld>
     <p:spTree>
       <p:nvGrpSpPr>
@@ -5626,7 +5755,7 @@
             <a:miter lim="400000"/>
           </a:ln>
           <a:effectLst>
-            <a:outerShdw sx="100000" sy="100000" kx="0" ky="0" algn="b" rotWithShape="0" blurRad="38100" dist="23000" dir="5400000">
+            <a:outerShdw blurRad="38100" dist="23000" dir="5400000" rotWithShape="0">
               <a:srgbClr val="000000">
                 <a:alpha val="35000"/>
               </a:srgbClr>
@@ -5644,6 +5773,7 @@
                 </a:solidFill>
               </a:defRPr>
             </a:pPr>
+            <a:endParaRPr/>
           </a:p>
         </p:txBody>
       </p:sp>
@@ -5666,7 +5796,7 @@
           </a:ln>
           <a:extLst>
             <a:ext uri="{C572A759-6A51-4108-AA02-DFA0A04FC94B}">
-              <ma14:wrappingTextBoxFlag xmlns:ma14="http://schemas.microsoft.com/office/mac/drawingml/2011/main" val="1"/>
+              <ma14:wrappingTextBoxFlag xmlns:ma14="http://schemas.microsoft.com/office/mac/drawingml/2011/main" xmlns:a14="http://schemas.microsoft.com/office/drawing/2010/main" xmlns:m="http://schemas.openxmlformats.org/officeDocument/2006/math" xmlns="" val="1"/>
             </a:ext>
           </a:extLst>
         </p:spPr>
@@ -5676,7 +5806,7 @@
           </a:bodyPr>
           <a:lstStyle>
             <a:lvl1pPr>
-              <a:defRPr b="1" sz="3200">
+              <a:defRPr sz="3200" b="1">
                 <a:solidFill>
                   <a:srgbClr val="FFFFFF"/>
                 </a:solidFill>
@@ -5684,7 +5814,6 @@
             </a:lvl1pPr>
           </a:lstStyle>
           <a:p>
-            <a:pPr/>
             <a:r>
               <a:t>Calibration Exercise</a:t>
             </a:r>
@@ -5710,7 +5839,7 @@
           </a:ln>
           <a:extLst>
             <a:ext uri="{C572A759-6A51-4108-AA02-DFA0A04FC94B}">
-              <ma14:wrappingTextBoxFlag xmlns:ma14="http://schemas.microsoft.com/office/mac/drawingml/2011/main" val="1"/>
+              <ma14:wrappingTextBoxFlag xmlns:ma14="http://schemas.microsoft.com/office/mac/drawingml/2011/main" xmlns:a14="http://schemas.microsoft.com/office/drawing/2010/main" xmlns:m="http://schemas.openxmlformats.org/officeDocument/2006/math" xmlns="" val="1"/>
             </a:ext>
           </a:extLst>
         </p:spPr>
@@ -5724,7 +5853,7 @@
               <a:spcBef>
                 <a:spcPts val="400"/>
               </a:spcBef>
-              <a:defRPr b="1" sz="2000">
+              <a:defRPr sz="2000" b="1">
                 <a:solidFill>
                   <a:srgbClr val="1B3A5C"/>
                 </a:solidFill>
@@ -5785,6 +5914,7 @@
               </a:spcBef>
               <a:defRPr sz="400"/>
             </a:pPr>
+            <a:endParaRPr/>
           </a:p>
           <a:p>
             <a:pPr>
@@ -5804,6 +5934,7 @@
               </a:spcBef>
               <a:defRPr sz="400"/>
             </a:pPr>
+            <a:endParaRPr/>
           </a:p>
           <a:p>
             <a:pPr>
@@ -5823,12 +5954,12 @@
   <p:clrMapOvr>
     <a:masterClrMapping/>
   </p:clrMapOvr>
-  <p:transition xmlns:p14="http://schemas.microsoft.com/office/powerpoint/2010/main" spd="med" advClick="1"/>
+  <p:transition spd="med"/>
 </p:sld>
 </file>
 
 <file path=ppt/slides/slide9.xml><?xml version="1.0" encoding="utf-8"?>
-<p:sld xmlns:a="http://schemas.openxmlformats.org/drawingml/2006/main" xmlns:r="http://schemas.openxmlformats.org/officeDocument/2006/relationships" xmlns:p="http://schemas.openxmlformats.org/presentationml/2006/main" xmlns:m="http://schemas.openxmlformats.org/officeDocument/2006/math" xmlns:a14="http://schemas.microsoft.com/office/drawing/2010/main" showMasterSp="1" showMasterPhAnim="1">
+<p:sld xmlns:a="http://schemas.openxmlformats.org/drawingml/2006/main" xmlns:r="http://schemas.openxmlformats.org/officeDocument/2006/relationships" xmlns:p="http://schemas.openxmlformats.org/presentationml/2006/main">
   <p:cSld>
     <p:spTree>
       <p:nvGrpSpPr>
@@ -5865,7 +5996,7 @@
             <a:miter lim="400000"/>
           </a:ln>
           <a:effectLst>
-            <a:outerShdw sx="100000" sy="100000" kx="0" ky="0" algn="b" rotWithShape="0" blurRad="38100" dist="23000" dir="5400000">
+            <a:outerShdw blurRad="38100" dist="23000" dir="5400000" rotWithShape="0">
               <a:srgbClr val="000000">
                 <a:alpha val="35000"/>
               </a:srgbClr>
@@ -5883,6 +6014,7 @@
                 </a:solidFill>
               </a:defRPr>
             </a:pPr>
+            <a:endParaRPr/>
           </a:p>
         </p:txBody>
       </p:sp>
@@ -5905,7 +6037,7 @@
           </a:ln>
           <a:extLst>
             <a:ext uri="{C572A759-6A51-4108-AA02-DFA0A04FC94B}">
-              <ma14:wrappingTextBoxFlag xmlns:ma14="http://schemas.microsoft.com/office/mac/drawingml/2011/main" val="1"/>
+              <ma14:wrappingTextBoxFlag xmlns:ma14="http://schemas.microsoft.com/office/mac/drawingml/2011/main" xmlns:a14="http://schemas.microsoft.com/office/drawing/2010/main" xmlns:m="http://schemas.openxmlformats.org/officeDocument/2006/math" xmlns="" val="1"/>
             </a:ext>
           </a:extLst>
         </p:spPr>
@@ -5915,7 +6047,7 @@
           </a:bodyPr>
           <a:lstStyle>
             <a:lvl1pPr>
-              <a:defRPr b="1" sz="3200">
+              <a:defRPr sz="3200" b="1">
                 <a:solidFill>
                   <a:srgbClr val="FFFFFF"/>
                 </a:solidFill>
@@ -5923,7 +6055,6 @@
             </a:lvl1pPr>
           </a:lstStyle>
           <a:p>
-            <a:pPr/>
             <a:r>
               <a:t>Your Turn!</a:t>
             </a:r>
@@ -5949,7 +6080,7 @@
           </a:ln>
           <a:extLst>
             <a:ext uri="{C572A759-6A51-4108-AA02-DFA0A04FC94B}">
-              <ma14:wrappingTextBoxFlag xmlns:ma14="http://schemas.microsoft.com/office/mac/drawingml/2011/main" val="1"/>
+              <ma14:wrappingTextBoxFlag xmlns:ma14="http://schemas.microsoft.com/office/mac/drawingml/2011/main" xmlns:a14="http://schemas.microsoft.com/office/drawing/2010/main" xmlns:m="http://schemas.openxmlformats.org/officeDocument/2006/math" xmlns="" val="1"/>
             </a:ext>
           </a:extLst>
         </p:spPr>
@@ -5963,7 +6094,7 @@
               <a:spcBef>
                 <a:spcPts val="400"/>
               </a:spcBef>
-              <a:defRPr b="1" sz="2000">
+              <a:defRPr sz="2000" b="1">
                 <a:solidFill>
                   <a:srgbClr val="1B3A5C"/>
                 </a:solidFill>
@@ -6035,13 +6166,14 @@
               </a:spcBef>
               <a:defRPr sz="400"/>
             </a:pPr>
+            <a:endParaRPr/>
           </a:p>
           <a:p>
             <a:pPr>
               <a:spcBef>
                 <a:spcPts val="400"/>
               </a:spcBef>
-              <a:defRPr b="1" sz="2000">
+              <a:defRPr sz="2000" b="1">
                 <a:solidFill>
                   <a:srgbClr val="1B3A5C"/>
                 </a:solidFill>
@@ -6091,12 +6223,12 @@
   <p:clrMapOvr>
     <a:masterClrMapping/>
   </p:clrMapOvr>
-  <p:transition xmlns:p14="http://schemas.microsoft.com/office/powerpoint/2010/main" spd="med" advClick="1"/>
+  <p:transition spd="med"/>
 </p:sld>
 </file>
 
 <file path=ppt/theme/theme1.xml><?xml version="1.0" encoding="utf-8"?>
-<a:theme xmlns:a="http://schemas.openxmlformats.org/drawingml/2006/main" xmlns:r="http://schemas.openxmlformats.org/officeDocument/2006/relationships" name="Office Theme">
+<a:theme xmlns:a="http://schemas.openxmlformats.org/drawingml/2006/main" name="Office Theme">
   <a:themeElements>
     <a:clrScheme name="Office Theme">
       <a:dk1>
@@ -6222,7 +6354,7 @@
       <a:effectStyleLst>
         <a:effectStyle>
           <a:effectLst>
-            <a:outerShdw sx="100000" sy="100000" kx="0" ky="0" algn="b" rotWithShape="0" blurRad="38100" dist="23000" dir="5400000">
+            <a:outerShdw blurRad="38100" dist="23000" dir="5400000" rotWithShape="0">
               <a:srgbClr val="000000">
                 <a:alpha val="35000"/>
               </a:srgbClr>
@@ -6231,7 +6363,7 @@
         </a:effectStyle>
         <a:effectStyle>
           <a:effectLst>
-            <a:outerShdw sx="100000" sy="100000" kx="0" ky="0" algn="b" rotWithShape="0" blurRad="38100" dist="23000" dir="5400000">
+            <a:outerShdw blurRad="38100" dist="23000" dir="5400000" rotWithShape="0">
               <a:srgbClr val="000000">
                 <a:alpha val="35000"/>
               </a:srgbClr>
@@ -6240,7 +6372,7 @@
         </a:effectStyle>
         <a:effectStyle>
           <a:effectLst>
-            <a:outerShdw sx="100000" sy="100000" kx="0" ky="0" algn="b" rotWithShape="0" blurRad="38100" dist="20000" dir="5400000">
+            <a:outerShdw blurRad="38100" dist="20000" dir="5400000" rotWithShape="0">
               <a:srgbClr val="000000">
                 <a:alpha val="38000"/>
               </a:srgbClr>
@@ -6314,7 +6446,7 @@
           <a:round/>
         </a:ln>
         <a:effectLst>
-          <a:outerShdw sx="100000" sy="100000" kx="0" ky="0" algn="b" rotWithShape="0" blurRad="38100" dist="23000" dir="5400000">
+          <a:outerShdw blurRad="38100" dist="23000" dir="5400000" rotWithShape="0">
             <a:srgbClr val="000000">
               <a:alpha val="35000"/>
             </a:srgbClr>
@@ -6322,7 +6454,7 @@
         </a:effectLst>
         <a:sp3d/>
       </a:spPr>
-      <a:bodyPr rot="0" spcFirstLastPara="1" vertOverflow="overflow" horzOverflow="overflow" vert="horz" wrap="square" lIns="45719" tIns="45719" rIns="45719" bIns="45719" numCol="1" spcCol="38100" rtlCol="0" anchor="ctr" upright="0">
+      <a:bodyPr rot="0" spcFirstLastPara="1" vertOverflow="overflow" horzOverflow="overflow" vert="horz" wrap="square" lIns="45719" tIns="45719" rIns="45719" bIns="45719" numCol="1" spcCol="38100" rtlCol="0" anchor="ctr">
         <a:spAutoFit/>
       </a:bodyPr>
       <a:lstStyle>
@@ -6341,7 +6473,7 @@
           <a:buFontTx/>
           <a:buNone/>
           <a:tabLst/>
-          <a:defRPr b="0" baseline="0" cap="none" i="0" spc="0" strike="noStrike" sz="1800" u="none" kumimoji="0" normalizeH="0">
+          <a:defRPr kumimoji="0" sz="1800" b="0" i="0" u="none" strike="noStrike" cap="none" spc="0" normalizeH="0" baseline="0">
             <a:ln>
               <a:noFill/>
             </a:ln>
@@ -6371,7 +6503,7 @@
           <a:buFontTx/>
           <a:buNone/>
           <a:tabLst/>
-          <a:defRPr b="0" baseline="0" cap="none" i="0" spc="0" strike="noStrike" sz="1800" u="none" kumimoji="0" normalizeH="0">
+          <a:defRPr kumimoji="0" sz="1800" b="0" i="0" u="none" strike="noStrike" cap="none" spc="0" normalizeH="0" baseline="0">
             <a:ln>
               <a:noFill/>
             </a:ln>
@@ -6397,7 +6529,7 @@
           <a:buFontTx/>
           <a:buNone/>
           <a:tabLst/>
-          <a:defRPr b="0" baseline="0" cap="none" i="0" spc="0" strike="noStrike" sz="1800" u="none" kumimoji="0" normalizeH="0">
+          <a:defRPr kumimoji="0" sz="1800" b="0" i="0" u="none" strike="noStrike" cap="none" spc="0" normalizeH="0" baseline="0">
             <a:ln>
               <a:noFill/>
             </a:ln>
@@ -6423,7 +6555,7 @@
           <a:buFontTx/>
           <a:buNone/>
           <a:tabLst/>
-          <a:defRPr b="0" baseline="0" cap="none" i="0" spc="0" strike="noStrike" sz="1800" u="none" kumimoji="0" normalizeH="0">
+          <a:defRPr kumimoji="0" sz="1800" b="0" i="0" u="none" strike="noStrike" cap="none" spc="0" normalizeH="0" baseline="0">
             <a:ln>
               <a:noFill/>
             </a:ln>
@@ -6449,7 +6581,7 @@
           <a:buFontTx/>
           <a:buNone/>
           <a:tabLst/>
-          <a:defRPr b="0" baseline="0" cap="none" i="0" spc="0" strike="noStrike" sz="1800" u="none" kumimoji="0" normalizeH="0">
+          <a:defRPr kumimoji="0" sz="1800" b="0" i="0" u="none" strike="noStrike" cap="none" spc="0" normalizeH="0" baseline="0">
             <a:ln>
               <a:noFill/>
             </a:ln>
@@ -6475,7 +6607,7 @@
           <a:buFontTx/>
           <a:buNone/>
           <a:tabLst/>
-          <a:defRPr b="0" baseline="0" cap="none" i="0" spc="0" strike="noStrike" sz="1800" u="none" kumimoji="0" normalizeH="0">
+          <a:defRPr kumimoji="0" sz="1800" b="0" i="0" u="none" strike="noStrike" cap="none" spc="0" normalizeH="0" baseline="0">
             <a:ln>
               <a:noFill/>
             </a:ln>
@@ -6501,7 +6633,7 @@
           <a:buFontTx/>
           <a:buNone/>
           <a:tabLst/>
-          <a:defRPr b="0" baseline="0" cap="none" i="0" spc="0" strike="noStrike" sz="1800" u="none" kumimoji="0" normalizeH="0">
+          <a:defRPr kumimoji="0" sz="1800" b="0" i="0" u="none" strike="noStrike" cap="none" spc="0" normalizeH="0" baseline="0">
             <a:ln>
               <a:noFill/>
             </a:ln>
@@ -6527,7 +6659,7 @@
           <a:buFontTx/>
           <a:buNone/>
           <a:tabLst/>
-          <a:defRPr b="0" baseline="0" cap="none" i="0" spc="0" strike="noStrike" sz="1800" u="none" kumimoji="0" normalizeH="0">
+          <a:defRPr kumimoji="0" sz="1800" b="0" i="0" u="none" strike="noStrike" cap="none" spc="0" normalizeH="0" baseline="0">
             <a:ln>
               <a:noFill/>
             </a:ln>
@@ -6553,7 +6685,7 @@
           <a:buFontTx/>
           <a:buNone/>
           <a:tabLst/>
-          <a:defRPr b="0" baseline="0" cap="none" i="0" spc="0" strike="noStrike" sz="1800" u="none" kumimoji="0" normalizeH="0">
+          <a:defRPr kumimoji="0" sz="1800" b="0" i="0" u="none" strike="noStrike" cap="none" spc="0" normalizeH="0" baseline="0">
             <a:ln>
               <a:noFill/>
             </a:ln>
@@ -6579,7 +6711,7 @@
           <a:buFontTx/>
           <a:buNone/>
           <a:tabLst/>
-          <a:defRPr b="0" baseline="0" cap="none" i="0" spc="0" strike="noStrike" sz="1800" u="none" kumimoji="0" normalizeH="0">
+          <a:defRPr kumimoji="0" sz="1800" b="0" i="0" u="none" strike="noStrike" cap="none" spc="0" normalizeH="0" baseline="0">
             <a:ln>
               <a:noFill/>
             </a:ln>
@@ -6592,9 +6724,15 @@
         </a:lvl9pPr>
       </a:lstStyle>
       <a:style>
-        <a:lnRef idx="0"/>
-        <a:fillRef idx="0"/>
-        <a:effectRef idx="0"/>
+        <a:lnRef idx="0">
+          <a:scrgbClr r="0" g="0" b="0"/>
+        </a:lnRef>
+        <a:fillRef idx="0">
+          <a:scrgbClr r="0" g="0" b="0"/>
+        </a:fillRef>
+        <a:effectRef idx="0">
+          <a:scrgbClr r="0" g="0" b="0"/>
+        </a:effectRef>
         <a:fontRef idx="none"/>
       </a:style>
     </a:spDef>
@@ -6609,7 +6747,7 @@
           <a:round/>
         </a:ln>
         <a:effectLst>
-          <a:outerShdw sx="100000" sy="100000" kx="0" ky="0" algn="b" rotWithShape="0" blurRad="38100" dist="20000" dir="5400000">
+          <a:outerShdw blurRad="38100" dist="20000" dir="5400000" rotWithShape="0">
             <a:srgbClr val="000000">
               <a:alpha val="38000"/>
             </a:srgbClr>
@@ -6617,7 +6755,7 @@
         </a:effectLst>
         <a:sp3d/>
       </a:spPr>
-      <a:bodyPr rot="0" spcFirstLastPara="1" vertOverflow="overflow" horzOverflow="overflow" vert="horz" wrap="square" lIns="91439" tIns="45719" rIns="91439" bIns="45719" numCol="1" spcCol="38100" rtlCol="0" anchor="t" upright="0">
+      <a:bodyPr rot="0" spcFirstLastPara="1" vertOverflow="overflow" horzOverflow="overflow" vert="horz" wrap="square" lIns="91439" tIns="45719" rIns="91439" bIns="45719" numCol="1" spcCol="38100" rtlCol="0" anchor="t">
         <a:noAutofit/>
       </a:bodyPr>
       <a:lstStyle>
@@ -6636,7 +6774,7 @@
           <a:buFontTx/>
           <a:buNone/>
           <a:tabLst/>
-          <a:defRPr b="0" baseline="0" cap="none" i="0" spc="0" strike="noStrike" sz="1800" u="none" kumimoji="0" normalizeH="0">
+          <a:defRPr kumimoji="0" sz="1800" b="0" i="0" u="none" strike="noStrike" cap="none" spc="0" normalizeH="0" baseline="0">
             <a:ln>
               <a:noFill/>
             </a:ln>
@@ -6662,7 +6800,7 @@
           <a:buFontTx/>
           <a:buNone/>
           <a:tabLst/>
-          <a:defRPr b="0" baseline="0" cap="none" i="0" spc="0" strike="noStrike" sz="1800" u="none" kumimoji="0" normalizeH="0">
+          <a:defRPr kumimoji="0" sz="1800" b="0" i="0" u="none" strike="noStrike" cap="none" spc="0" normalizeH="0" baseline="0">
             <a:ln>
               <a:noFill/>
             </a:ln>
@@ -6688,7 +6826,7 @@
           <a:buFontTx/>
           <a:buNone/>
           <a:tabLst/>
-          <a:defRPr b="0" baseline="0" cap="none" i="0" spc="0" strike="noStrike" sz="1800" u="none" kumimoji="0" normalizeH="0">
+          <a:defRPr kumimoji="0" sz="1800" b="0" i="0" u="none" strike="noStrike" cap="none" spc="0" normalizeH="0" baseline="0">
             <a:ln>
               <a:noFill/>
             </a:ln>
@@ -6714,7 +6852,7 @@
           <a:buFontTx/>
           <a:buNone/>
           <a:tabLst/>
-          <a:defRPr b="0" baseline="0" cap="none" i="0" spc="0" strike="noStrike" sz="1800" u="none" kumimoji="0" normalizeH="0">
+          <a:defRPr kumimoji="0" sz="1800" b="0" i="0" u="none" strike="noStrike" cap="none" spc="0" normalizeH="0" baseline="0">
             <a:ln>
               <a:noFill/>
             </a:ln>
@@ -6740,7 +6878,7 @@
           <a:buFontTx/>
           <a:buNone/>
           <a:tabLst/>
-          <a:defRPr b="0" baseline="0" cap="none" i="0" spc="0" strike="noStrike" sz="1800" u="none" kumimoji="0" normalizeH="0">
+          <a:defRPr kumimoji="0" sz="1800" b="0" i="0" u="none" strike="noStrike" cap="none" spc="0" normalizeH="0" baseline="0">
             <a:ln>
               <a:noFill/>
             </a:ln>
@@ -6766,7 +6904,7 @@
           <a:buFontTx/>
           <a:buNone/>
           <a:tabLst/>
-          <a:defRPr b="0" baseline="0" cap="none" i="0" spc="0" strike="noStrike" sz="1800" u="none" kumimoji="0" normalizeH="0">
+          <a:defRPr kumimoji="0" sz="1800" b="0" i="0" u="none" strike="noStrike" cap="none" spc="0" normalizeH="0" baseline="0">
             <a:ln>
               <a:noFill/>
             </a:ln>
@@ -6792,7 +6930,7 @@
           <a:buFontTx/>
           <a:buNone/>
           <a:tabLst/>
-          <a:defRPr b="0" baseline="0" cap="none" i="0" spc="0" strike="noStrike" sz="1800" u="none" kumimoji="0" normalizeH="0">
+          <a:defRPr kumimoji="0" sz="1800" b="0" i="0" u="none" strike="noStrike" cap="none" spc="0" normalizeH="0" baseline="0">
             <a:ln>
               <a:noFill/>
             </a:ln>
@@ -6818,7 +6956,7 @@
           <a:buFontTx/>
           <a:buNone/>
           <a:tabLst/>
-          <a:defRPr b="0" baseline="0" cap="none" i="0" spc="0" strike="noStrike" sz="1800" u="none" kumimoji="0" normalizeH="0">
+          <a:defRPr kumimoji="0" sz="1800" b="0" i="0" u="none" strike="noStrike" cap="none" spc="0" normalizeH="0" baseline="0">
             <a:ln>
               <a:noFill/>
             </a:ln>
@@ -6844,7 +6982,7 @@
           <a:buFontTx/>
           <a:buNone/>
           <a:tabLst/>
-          <a:defRPr b="0" baseline="0" cap="none" i="0" spc="0" strike="noStrike" sz="1800" u="none" kumimoji="0" normalizeH="0">
+          <a:defRPr kumimoji="0" sz="1800" b="0" i="0" u="none" strike="noStrike" cap="none" spc="0" normalizeH="0" baseline="0">
             <a:ln>
               <a:noFill/>
             </a:ln>
@@ -6870,7 +7008,7 @@
           <a:buFontTx/>
           <a:buNone/>
           <a:tabLst/>
-          <a:defRPr b="0" baseline="0" cap="none" i="0" spc="0" strike="noStrike" sz="1800" u="none" kumimoji="0" normalizeH="0">
+          <a:defRPr kumimoji="0" sz="1800" b="0" i="0" u="none" strike="noStrike" cap="none" spc="0" normalizeH="0" baseline="0">
             <a:ln>
               <a:noFill/>
             </a:ln>
@@ -6883,9 +7021,15 @@
         </a:lvl9pPr>
       </a:lstStyle>
       <a:style>
-        <a:lnRef idx="0"/>
-        <a:fillRef idx="0"/>
-        <a:effectRef idx="0"/>
+        <a:lnRef idx="0">
+          <a:scrgbClr r="0" g="0" b="0"/>
+        </a:lnRef>
+        <a:fillRef idx="0">
+          <a:scrgbClr r="0" g="0" b="0"/>
+        </a:fillRef>
+        <a:effectRef idx="0">
+          <a:scrgbClr r="0" g="0" b="0"/>
+        </a:effectRef>
         <a:fontRef idx="none"/>
       </a:style>
     </a:lnDef>
@@ -6899,7 +7043,7 @@
         <a:effectLst/>
         <a:sp3d/>
       </a:spPr>
-      <a:bodyPr rot="0" spcFirstLastPara="1" vertOverflow="overflow" horzOverflow="overflow" vert="horz" wrap="square" lIns="45719" tIns="45719" rIns="45719" bIns="45719" numCol="1" spcCol="38100" rtlCol="0" anchor="t" upright="0">
+      <a:bodyPr rot="0" spcFirstLastPara="1" vertOverflow="overflow" horzOverflow="overflow" vert="horz" wrap="square" lIns="45719" tIns="45719" rIns="45719" bIns="45719" numCol="1" spcCol="38100" rtlCol="0" anchor="t">
         <a:spAutoFit/>
       </a:bodyPr>
       <a:lstStyle>
@@ -6918,7 +7062,7 @@
           <a:buFontTx/>
           <a:buNone/>
           <a:tabLst/>
-          <a:defRPr b="0" baseline="0" cap="none" i="0" spc="0" strike="noStrike" sz="1800" u="none" kumimoji="0" normalizeH="0">
+          <a:defRPr kumimoji="0" sz="1800" b="0" i="0" u="none" strike="noStrike" cap="none" spc="0" normalizeH="0" baseline="0">
             <a:ln>
               <a:noFill/>
             </a:ln>
@@ -6948,7 +7092,7 @@
           <a:buFontTx/>
           <a:buNone/>
           <a:tabLst/>
-          <a:defRPr b="0" baseline="0" cap="none" i="0" spc="0" strike="noStrike" sz="1800" u="none" kumimoji="0" normalizeH="0">
+          <a:defRPr kumimoji="0" sz="1800" b="0" i="0" u="none" strike="noStrike" cap="none" spc="0" normalizeH="0" baseline="0">
             <a:ln>
               <a:noFill/>
             </a:ln>
@@ -6974,7 +7118,7 @@
           <a:buFontTx/>
           <a:buNone/>
           <a:tabLst/>
-          <a:defRPr b="0" baseline="0" cap="none" i="0" spc="0" strike="noStrike" sz="1800" u="none" kumimoji="0" normalizeH="0">
+          <a:defRPr kumimoji="0" sz="1800" b="0" i="0" u="none" strike="noStrike" cap="none" spc="0" normalizeH="0" baseline="0">
             <a:ln>
               <a:noFill/>
             </a:ln>
@@ -7000,7 +7144,7 @@
           <a:buFontTx/>
           <a:buNone/>
           <a:tabLst/>
-          <a:defRPr b="0" baseline="0" cap="none" i="0" spc="0" strike="noStrike" sz="1800" u="none" kumimoji="0" normalizeH="0">
+          <a:defRPr kumimoji="0" sz="1800" b="0" i="0" u="none" strike="noStrike" cap="none" spc="0" normalizeH="0" baseline="0">
             <a:ln>
               <a:noFill/>
             </a:ln>
@@ -7026,7 +7170,7 @@
           <a:buFontTx/>
           <a:buNone/>
           <a:tabLst/>
-          <a:defRPr b="0" baseline="0" cap="none" i="0" spc="0" strike="noStrike" sz="1800" u="none" kumimoji="0" normalizeH="0">
+          <a:defRPr kumimoji="0" sz="1800" b="0" i="0" u="none" strike="noStrike" cap="none" spc="0" normalizeH="0" baseline="0">
             <a:ln>
               <a:noFill/>
             </a:ln>
@@ -7052,7 +7196,7 @@
           <a:buFontTx/>
           <a:buNone/>
           <a:tabLst/>
-          <a:defRPr b="0" baseline="0" cap="none" i="0" spc="0" strike="noStrike" sz="1800" u="none" kumimoji="0" normalizeH="0">
+          <a:defRPr kumimoji="0" sz="1800" b="0" i="0" u="none" strike="noStrike" cap="none" spc="0" normalizeH="0" baseline="0">
             <a:ln>
               <a:noFill/>
             </a:ln>
@@ -7078,7 +7222,7 @@
           <a:buFontTx/>
           <a:buNone/>
           <a:tabLst/>
-          <a:defRPr b="0" baseline="0" cap="none" i="0" spc="0" strike="noStrike" sz="1800" u="none" kumimoji="0" normalizeH="0">
+          <a:defRPr kumimoji="0" sz="1800" b="0" i="0" u="none" strike="noStrike" cap="none" spc="0" normalizeH="0" baseline="0">
             <a:ln>
               <a:noFill/>
             </a:ln>
@@ -7104,7 +7248,7 @@
           <a:buFontTx/>
           <a:buNone/>
           <a:tabLst/>
-          <a:defRPr b="0" baseline="0" cap="none" i="0" spc="0" strike="noStrike" sz="1800" u="none" kumimoji="0" normalizeH="0">
+          <a:defRPr kumimoji="0" sz="1800" b="0" i="0" u="none" strike="noStrike" cap="none" spc="0" normalizeH="0" baseline="0">
             <a:ln>
               <a:noFill/>
             </a:ln>
@@ -7130,7 +7274,7 @@
           <a:buFontTx/>
           <a:buNone/>
           <a:tabLst/>
-          <a:defRPr b="0" baseline="0" cap="none" i="0" spc="0" strike="noStrike" sz="1800" u="none" kumimoji="0" normalizeH="0">
+          <a:defRPr kumimoji="0" sz="1800" b="0" i="0" u="none" strike="noStrike" cap="none" spc="0" normalizeH="0" baseline="0">
             <a:ln>
               <a:noFill/>
             </a:ln>
@@ -7156,7 +7300,7 @@
           <a:buFontTx/>
           <a:buNone/>
           <a:tabLst/>
-          <a:defRPr b="0" baseline="0" cap="none" i="0" spc="0" strike="noStrike" sz="1800" u="none" kumimoji="0" normalizeH="0">
+          <a:defRPr kumimoji="0" sz="1800" b="0" i="0" u="none" strike="noStrike" cap="none" spc="0" normalizeH="0" baseline="0">
             <a:ln>
               <a:noFill/>
             </a:ln>
@@ -7169,18 +7313,25 @@
         </a:lvl9pPr>
       </a:lstStyle>
       <a:style>
-        <a:lnRef idx="0"/>
-        <a:fillRef idx="0"/>
-        <a:effectRef idx="0"/>
+        <a:lnRef idx="0">
+          <a:scrgbClr r="0" g="0" b="0"/>
+        </a:lnRef>
+        <a:fillRef idx="0">
+          <a:scrgbClr r="0" g="0" b="0"/>
+        </a:fillRef>
+        <a:effectRef idx="0">
+          <a:scrgbClr r="0" g="0" b="0"/>
+        </a:effectRef>
         <a:fontRef idx="none"/>
       </a:style>
     </a:txDef>
   </a:objectDefaults>
+  <a:extraClrSchemeLst/>
 </a:theme>
 </file>
 
 <file path=ppt/theme/theme2.xml><?xml version="1.0" encoding="utf-8"?>
-<a:theme xmlns:a="http://schemas.openxmlformats.org/drawingml/2006/main" xmlns:r="http://schemas.openxmlformats.org/officeDocument/2006/relationships" name="Office Theme">
+<a:theme xmlns:a="http://schemas.openxmlformats.org/drawingml/2006/main" name="Office Theme">
   <a:themeElements>
     <a:clrScheme name="Office Theme">
       <a:dk1>
@@ -7306,7 +7457,7 @@
       <a:effectStyleLst>
         <a:effectStyle>
           <a:effectLst>
-            <a:outerShdw sx="100000" sy="100000" kx="0" ky="0" algn="b" rotWithShape="0" blurRad="38100" dist="23000" dir="5400000">
+            <a:outerShdw blurRad="38100" dist="23000" dir="5400000" rotWithShape="0">
               <a:srgbClr val="000000">
                 <a:alpha val="35000"/>
               </a:srgbClr>
@@ -7315,7 +7466,7 @@
         </a:effectStyle>
         <a:effectStyle>
           <a:effectLst>
-            <a:outerShdw sx="100000" sy="100000" kx="0" ky="0" algn="b" rotWithShape="0" blurRad="38100" dist="23000" dir="5400000">
+            <a:outerShdw blurRad="38100" dist="23000" dir="5400000" rotWithShape="0">
               <a:srgbClr val="000000">
                 <a:alpha val="35000"/>
               </a:srgbClr>
@@ -7324,7 +7475,7 @@
         </a:effectStyle>
         <a:effectStyle>
           <a:effectLst>
-            <a:outerShdw sx="100000" sy="100000" kx="0" ky="0" algn="b" rotWithShape="0" blurRad="38100" dist="20000" dir="5400000">
+            <a:outerShdw blurRad="38100" dist="20000" dir="5400000" rotWithShape="0">
               <a:srgbClr val="000000">
                 <a:alpha val="38000"/>
               </a:srgbClr>
@@ -7398,7 +7549,7 @@
           <a:round/>
         </a:ln>
         <a:effectLst>
-          <a:outerShdw sx="100000" sy="100000" kx="0" ky="0" algn="b" rotWithShape="0" blurRad="38100" dist="23000" dir="5400000">
+          <a:outerShdw blurRad="38100" dist="23000" dir="5400000" rotWithShape="0">
             <a:srgbClr val="000000">
               <a:alpha val="35000"/>
             </a:srgbClr>
@@ -7406,7 +7557,7 @@
         </a:effectLst>
         <a:sp3d/>
       </a:spPr>
-      <a:bodyPr rot="0" spcFirstLastPara="1" vertOverflow="overflow" horzOverflow="overflow" vert="horz" wrap="square" lIns="45719" tIns="45719" rIns="45719" bIns="45719" numCol="1" spcCol="38100" rtlCol="0" anchor="ctr" upright="0">
+      <a:bodyPr rot="0" spcFirstLastPara="1" vertOverflow="overflow" horzOverflow="overflow" vert="horz" wrap="square" lIns="45719" tIns="45719" rIns="45719" bIns="45719" numCol="1" spcCol="38100" rtlCol="0" anchor="ctr">
         <a:spAutoFit/>
       </a:bodyPr>
       <a:lstStyle>
@@ -7425,7 +7576,7 @@
           <a:buFontTx/>
           <a:buNone/>
           <a:tabLst/>
-          <a:defRPr b="0" baseline="0" cap="none" i="0" spc="0" strike="noStrike" sz="1800" u="none" kumimoji="0" normalizeH="0">
+          <a:defRPr kumimoji="0" sz="1800" b="0" i="0" u="none" strike="noStrike" cap="none" spc="0" normalizeH="0" baseline="0">
             <a:ln>
               <a:noFill/>
             </a:ln>
@@ -7455,7 +7606,7 @@
           <a:buFontTx/>
           <a:buNone/>
           <a:tabLst/>
-          <a:defRPr b="0" baseline="0" cap="none" i="0" spc="0" strike="noStrike" sz="1800" u="none" kumimoji="0" normalizeH="0">
+          <a:defRPr kumimoji="0" sz="1800" b="0" i="0" u="none" strike="noStrike" cap="none" spc="0" normalizeH="0" baseline="0">
             <a:ln>
               <a:noFill/>
             </a:ln>
@@ -7481,7 +7632,7 @@
           <a:buFontTx/>
           <a:buNone/>
           <a:tabLst/>
-          <a:defRPr b="0" baseline="0" cap="none" i="0" spc="0" strike="noStrike" sz="1800" u="none" kumimoji="0" normalizeH="0">
+          <a:defRPr kumimoji="0" sz="1800" b="0" i="0" u="none" strike="noStrike" cap="none" spc="0" normalizeH="0" baseline="0">
             <a:ln>
               <a:noFill/>
             </a:ln>
@@ -7507,7 +7658,7 @@
           <a:buFontTx/>
           <a:buNone/>
           <a:tabLst/>
-          <a:defRPr b="0" baseline="0" cap="none" i="0" spc="0" strike="noStrike" sz="1800" u="none" kumimoji="0" normalizeH="0">
+          <a:defRPr kumimoji="0" sz="1800" b="0" i="0" u="none" strike="noStrike" cap="none" spc="0" normalizeH="0" baseline="0">
             <a:ln>
               <a:noFill/>
             </a:ln>
@@ -7533,7 +7684,7 @@
           <a:buFontTx/>
           <a:buNone/>
           <a:tabLst/>
-          <a:defRPr b="0" baseline="0" cap="none" i="0" spc="0" strike="noStrike" sz="1800" u="none" kumimoji="0" normalizeH="0">
+          <a:defRPr kumimoji="0" sz="1800" b="0" i="0" u="none" strike="noStrike" cap="none" spc="0" normalizeH="0" baseline="0">
             <a:ln>
               <a:noFill/>
             </a:ln>
@@ -7559,7 +7710,7 @@
           <a:buFontTx/>
           <a:buNone/>
           <a:tabLst/>
-          <a:defRPr b="0" baseline="0" cap="none" i="0" spc="0" strike="noStrike" sz="1800" u="none" kumimoji="0" normalizeH="0">
+          <a:defRPr kumimoji="0" sz="1800" b="0" i="0" u="none" strike="noStrike" cap="none" spc="0" normalizeH="0" baseline="0">
             <a:ln>
               <a:noFill/>
             </a:ln>
@@ -7585,7 +7736,7 @@
           <a:buFontTx/>
           <a:buNone/>
           <a:tabLst/>
-          <a:defRPr b="0" baseline="0" cap="none" i="0" spc="0" strike="noStrike" sz="1800" u="none" kumimoji="0" normalizeH="0">
+          <a:defRPr kumimoji="0" sz="1800" b="0" i="0" u="none" strike="noStrike" cap="none" spc="0" normalizeH="0" baseline="0">
             <a:ln>
               <a:noFill/>
             </a:ln>
@@ -7611,7 +7762,7 @@
           <a:buFontTx/>
           <a:buNone/>
           <a:tabLst/>
-          <a:defRPr b="0" baseline="0" cap="none" i="0" spc="0" strike="noStrike" sz="1800" u="none" kumimoji="0" normalizeH="0">
+          <a:defRPr kumimoji="0" sz="1800" b="0" i="0" u="none" strike="noStrike" cap="none" spc="0" normalizeH="0" baseline="0">
             <a:ln>
               <a:noFill/>
             </a:ln>
@@ -7637,7 +7788,7 @@
           <a:buFontTx/>
           <a:buNone/>
           <a:tabLst/>
-          <a:defRPr b="0" baseline="0" cap="none" i="0" spc="0" strike="noStrike" sz="1800" u="none" kumimoji="0" normalizeH="0">
+          <a:defRPr kumimoji="0" sz="1800" b="0" i="0" u="none" strike="noStrike" cap="none" spc="0" normalizeH="0" baseline="0">
             <a:ln>
               <a:noFill/>
             </a:ln>
@@ -7663,7 +7814,7 @@
           <a:buFontTx/>
           <a:buNone/>
           <a:tabLst/>
-          <a:defRPr b="0" baseline="0" cap="none" i="0" spc="0" strike="noStrike" sz="1800" u="none" kumimoji="0" normalizeH="0">
+          <a:defRPr kumimoji="0" sz="1800" b="0" i="0" u="none" strike="noStrike" cap="none" spc="0" normalizeH="0" baseline="0">
             <a:ln>
               <a:noFill/>
             </a:ln>
@@ -7676,9 +7827,15 @@
         </a:lvl9pPr>
       </a:lstStyle>
       <a:style>
-        <a:lnRef idx="0"/>
-        <a:fillRef idx="0"/>
-        <a:effectRef idx="0"/>
+        <a:lnRef idx="0">
+          <a:scrgbClr r="0" g="0" b="0"/>
+        </a:lnRef>
+        <a:fillRef idx="0">
+          <a:scrgbClr r="0" g="0" b="0"/>
+        </a:fillRef>
+        <a:effectRef idx="0">
+          <a:scrgbClr r="0" g="0" b="0"/>
+        </a:effectRef>
         <a:fontRef idx="none"/>
       </a:style>
     </a:spDef>
@@ -7693,7 +7850,7 @@
           <a:round/>
         </a:ln>
         <a:effectLst>
-          <a:outerShdw sx="100000" sy="100000" kx="0" ky="0" algn="b" rotWithShape="0" blurRad="38100" dist="20000" dir="5400000">
+          <a:outerShdw blurRad="38100" dist="20000" dir="5400000" rotWithShape="0">
             <a:srgbClr val="000000">
               <a:alpha val="38000"/>
             </a:srgbClr>
@@ -7701,7 +7858,7 @@
         </a:effectLst>
         <a:sp3d/>
       </a:spPr>
-      <a:bodyPr rot="0" spcFirstLastPara="1" vertOverflow="overflow" horzOverflow="overflow" vert="horz" wrap="square" lIns="91439" tIns="45719" rIns="91439" bIns="45719" numCol="1" spcCol="38100" rtlCol="0" anchor="t" upright="0">
+      <a:bodyPr rot="0" spcFirstLastPara="1" vertOverflow="overflow" horzOverflow="overflow" vert="horz" wrap="square" lIns="91439" tIns="45719" rIns="91439" bIns="45719" numCol="1" spcCol="38100" rtlCol="0" anchor="t">
         <a:noAutofit/>
       </a:bodyPr>
       <a:lstStyle>
@@ -7720,7 +7877,7 @@
           <a:buFontTx/>
           <a:buNone/>
           <a:tabLst/>
-          <a:defRPr b="0" baseline="0" cap="none" i="0" spc="0" strike="noStrike" sz="1800" u="none" kumimoji="0" normalizeH="0">
+          <a:defRPr kumimoji="0" sz="1800" b="0" i="0" u="none" strike="noStrike" cap="none" spc="0" normalizeH="0" baseline="0">
             <a:ln>
               <a:noFill/>
             </a:ln>
@@ -7746,7 +7903,7 @@
           <a:buFontTx/>
           <a:buNone/>
           <a:tabLst/>
-          <a:defRPr b="0" baseline="0" cap="none" i="0" spc="0" strike="noStrike" sz="1800" u="none" kumimoji="0" normalizeH="0">
+          <a:defRPr kumimoji="0" sz="1800" b="0" i="0" u="none" strike="noStrike" cap="none" spc="0" normalizeH="0" baseline="0">
             <a:ln>
               <a:noFill/>
             </a:ln>
@@ -7772,7 +7929,7 @@
           <a:buFontTx/>
           <a:buNone/>
           <a:tabLst/>
-          <a:defRPr b="0" baseline="0" cap="none" i="0" spc="0" strike="noStrike" sz="1800" u="none" kumimoji="0" normalizeH="0">
+          <a:defRPr kumimoji="0" sz="1800" b="0" i="0" u="none" strike="noStrike" cap="none" spc="0" normalizeH="0" baseline="0">
             <a:ln>
               <a:noFill/>
             </a:ln>
@@ -7798,7 +7955,7 @@
           <a:buFontTx/>
           <a:buNone/>
           <a:tabLst/>
-          <a:defRPr b="0" baseline="0" cap="none" i="0" spc="0" strike="noStrike" sz="1800" u="none" kumimoji="0" normalizeH="0">
+          <a:defRPr kumimoji="0" sz="1800" b="0" i="0" u="none" strike="noStrike" cap="none" spc="0" normalizeH="0" baseline="0">
             <a:ln>
               <a:noFill/>
             </a:ln>
@@ -7824,7 +7981,7 @@
           <a:buFontTx/>
           <a:buNone/>
           <a:tabLst/>
-          <a:defRPr b="0" baseline="0" cap="none" i="0" spc="0" strike="noStrike" sz="1800" u="none" kumimoji="0" normalizeH="0">
+          <a:defRPr kumimoji="0" sz="1800" b="0" i="0" u="none" strike="noStrike" cap="none" spc="0" normalizeH="0" baseline="0">
             <a:ln>
               <a:noFill/>
             </a:ln>
@@ -7850,7 +8007,7 @@
           <a:buFontTx/>
           <a:buNone/>
           <a:tabLst/>
-          <a:defRPr b="0" baseline="0" cap="none" i="0" spc="0" strike="noStrike" sz="1800" u="none" kumimoji="0" normalizeH="0">
+          <a:defRPr kumimoji="0" sz="1800" b="0" i="0" u="none" strike="noStrike" cap="none" spc="0" normalizeH="0" baseline="0">
             <a:ln>
               <a:noFill/>
             </a:ln>
@@ -7876,7 +8033,7 @@
           <a:buFontTx/>
           <a:buNone/>
           <a:tabLst/>
-          <a:defRPr b="0" baseline="0" cap="none" i="0" spc="0" strike="noStrike" sz="1800" u="none" kumimoji="0" normalizeH="0">
+          <a:defRPr kumimoji="0" sz="1800" b="0" i="0" u="none" strike="noStrike" cap="none" spc="0" normalizeH="0" baseline="0">
             <a:ln>
               <a:noFill/>
             </a:ln>
@@ -7902,7 +8059,7 @@
           <a:buFontTx/>
           <a:buNone/>
           <a:tabLst/>
-          <a:defRPr b="0" baseline="0" cap="none" i="0" spc="0" strike="noStrike" sz="1800" u="none" kumimoji="0" normalizeH="0">
+          <a:defRPr kumimoji="0" sz="1800" b="0" i="0" u="none" strike="noStrike" cap="none" spc="0" normalizeH="0" baseline="0">
             <a:ln>
               <a:noFill/>
             </a:ln>
@@ -7928,7 +8085,7 @@
           <a:buFontTx/>
           <a:buNone/>
           <a:tabLst/>
-          <a:defRPr b="0" baseline="0" cap="none" i="0" spc="0" strike="noStrike" sz="1800" u="none" kumimoji="0" normalizeH="0">
+          <a:defRPr kumimoji="0" sz="1800" b="0" i="0" u="none" strike="noStrike" cap="none" spc="0" normalizeH="0" baseline="0">
             <a:ln>
               <a:noFill/>
             </a:ln>
@@ -7954,7 +8111,7 @@
           <a:buFontTx/>
           <a:buNone/>
           <a:tabLst/>
-          <a:defRPr b="0" baseline="0" cap="none" i="0" spc="0" strike="noStrike" sz="1800" u="none" kumimoji="0" normalizeH="0">
+          <a:defRPr kumimoji="0" sz="1800" b="0" i="0" u="none" strike="noStrike" cap="none" spc="0" normalizeH="0" baseline="0">
             <a:ln>
               <a:noFill/>
             </a:ln>
@@ -7967,9 +8124,15 @@
         </a:lvl9pPr>
       </a:lstStyle>
       <a:style>
-        <a:lnRef idx="0"/>
-        <a:fillRef idx="0"/>
-        <a:effectRef idx="0"/>
+        <a:lnRef idx="0">
+          <a:scrgbClr r="0" g="0" b="0"/>
+        </a:lnRef>
+        <a:fillRef idx="0">
+          <a:scrgbClr r="0" g="0" b="0"/>
+        </a:fillRef>
+        <a:effectRef idx="0">
+          <a:scrgbClr r="0" g="0" b="0"/>
+        </a:effectRef>
         <a:fontRef idx="none"/>
       </a:style>
     </a:lnDef>
@@ -7983,7 +8146,7 @@
         <a:effectLst/>
         <a:sp3d/>
       </a:spPr>
-      <a:bodyPr rot="0" spcFirstLastPara="1" vertOverflow="overflow" horzOverflow="overflow" vert="horz" wrap="square" lIns="45719" tIns="45719" rIns="45719" bIns="45719" numCol="1" spcCol="38100" rtlCol="0" anchor="t" upright="0">
+      <a:bodyPr rot="0" spcFirstLastPara="1" vertOverflow="overflow" horzOverflow="overflow" vert="horz" wrap="square" lIns="45719" tIns="45719" rIns="45719" bIns="45719" numCol="1" spcCol="38100" rtlCol="0" anchor="t">
         <a:spAutoFit/>
       </a:bodyPr>
       <a:lstStyle>
@@ -8002,7 +8165,7 @@
           <a:buFontTx/>
           <a:buNone/>
           <a:tabLst/>
-          <a:defRPr b="0" baseline="0" cap="none" i="0" spc="0" strike="noStrike" sz="1800" u="none" kumimoji="0" normalizeH="0">
+          <a:defRPr kumimoji="0" sz="1800" b="0" i="0" u="none" strike="noStrike" cap="none" spc="0" normalizeH="0" baseline="0">
             <a:ln>
               <a:noFill/>
             </a:ln>
@@ -8032,7 +8195,7 @@
           <a:buFontTx/>
           <a:buNone/>
           <a:tabLst/>
-          <a:defRPr b="0" baseline="0" cap="none" i="0" spc="0" strike="noStrike" sz="1800" u="none" kumimoji="0" normalizeH="0">
+          <a:defRPr kumimoji="0" sz="1800" b="0" i="0" u="none" strike="noStrike" cap="none" spc="0" normalizeH="0" baseline="0">
             <a:ln>
               <a:noFill/>
             </a:ln>
@@ -8058,7 +8221,7 @@
           <a:buFontTx/>
           <a:buNone/>
           <a:tabLst/>
-          <a:defRPr b="0" baseline="0" cap="none" i="0" spc="0" strike="noStrike" sz="1800" u="none" kumimoji="0" normalizeH="0">
+          <a:defRPr kumimoji="0" sz="1800" b="0" i="0" u="none" strike="noStrike" cap="none" spc="0" normalizeH="0" baseline="0">
             <a:ln>
               <a:noFill/>
             </a:ln>
@@ -8084,7 +8247,7 @@
           <a:buFontTx/>
           <a:buNone/>
           <a:tabLst/>
-          <a:defRPr b="0" baseline="0" cap="none" i="0" spc="0" strike="noStrike" sz="1800" u="none" kumimoji="0" normalizeH="0">
+          <a:defRPr kumimoji="0" sz="1800" b="0" i="0" u="none" strike="noStrike" cap="none" spc="0" normalizeH="0" baseline="0">
             <a:ln>
               <a:noFill/>
             </a:ln>
@@ -8110,7 +8273,7 @@
           <a:buFontTx/>
           <a:buNone/>
           <a:tabLst/>
-          <a:defRPr b="0" baseline="0" cap="none" i="0" spc="0" strike="noStrike" sz="1800" u="none" kumimoji="0" normalizeH="0">
+          <a:defRPr kumimoji="0" sz="1800" b="0" i="0" u="none" strike="noStrike" cap="none" spc="0" normalizeH="0" baseline="0">
             <a:ln>
               <a:noFill/>
             </a:ln>
@@ -8136,7 +8299,7 @@
           <a:buFontTx/>
           <a:buNone/>
           <a:tabLst/>
-          <a:defRPr b="0" baseline="0" cap="none" i="0" spc="0" strike="noStrike" sz="1800" u="none" kumimoji="0" normalizeH="0">
+          <a:defRPr kumimoji="0" sz="1800" b="0" i="0" u="none" strike="noStrike" cap="none" spc="0" normalizeH="0" baseline="0">
             <a:ln>
               <a:noFill/>
             </a:ln>
@@ -8162,7 +8325,7 @@
           <a:buFontTx/>
           <a:buNone/>
           <a:tabLst/>
-          <a:defRPr b="0" baseline="0" cap="none" i="0" spc="0" strike="noStrike" sz="1800" u="none" kumimoji="0" normalizeH="0">
+          <a:defRPr kumimoji="0" sz="1800" b="0" i="0" u="none" strike="noStrike" cap="none" spc="0" normalizeH="0" baseline="0">
             <a:ln>
               <a:noFill/>
             </a:ln>
@@ -8188,7 +8351,7 @@
           <a:buFontTx/>
           <a:buNone/>
           <a:tabLst/>
-          <a:defRPr b="0" baseline="0" cap="none" i="0" spc="0" strike="noStrike" sz="1800" u="none" kumimoji="0" normalizeH="0">
+          <a:defRPr kumimoji="0" sz="1800" b="0" i="0" u="none" strike="noStrike" cap="none" spc="0" normalizeH="0" baseline="0">
             <a:ln>
               <a:noFill/>
             </a:ln>
@@ -8214,7 +8377,7 @@
           <a:buFontTx/>
           <a:buNone/>
           <a:tabLst/>
-          <a:defRPr b="0" baseline="0" cap="none" i="0" spc="0" strike="noStrike" sz="1800" u="none" kumimoji="0" normalizeH="0">
+          <a:defRPr kumimoji="0" sz="1800" b="0" i="0" u="none" strike="noStrike" cap="none" spc="0" normalizeH="0" baseline="0">
             <a:ln>
               <a:noFill/>
             </a:ln>
@@ -8240,7 +8403,7 @@
           <a:buFontTx/>
           <a:buNone/>
           <a:tabLst/>
-          <a:defRPr b="0" baseline="0" cap="none" i="0" spc="0" strike="noStrike" sz="1800" u="none" kumimoji="0" normalizeH="0">
+          <a:defRPr kumimoji="0" sz="1800" b="0" i="0" u="none" strike="noStrike" cap="none" spc="0" normalizeH="0" baseline="0">
             <a:ln>
               <a:noFill/>
             </a:ln>
@@ -8253,12 +8416,19 @@
         </a:lvl9pPr>
       </a:lstStyle>
       <a:style>
-        <a:lnRef idx="0"/>
-        <a:fillRef idx="0"/>
-        <a:effectRef idx="0"/>
+        <a:lnRef idx="0">
+          <a:scrgbClr r="0" g="0" b="0"/>
+        </a:lnRef>
+        <a:fillRef idx="0">
+          <a:scrgbClr r="0" g="0" b="0"/>
+        </a:fillRef>
+        <a:effectRef idx="0">
+          <a:scrgbClr r="0" g="0" b="0"/>
+        </a:effectRef>
         <a:fontRef idx="none"/>
       </a:style>
     </a:txDef>
   </a:objectDefaults>
+  <a:extraClrSchemeLst/>
 </a:theme>
 </file>